--- a/.lessons/59 Vendor Product And Related Features/4 Product- working with create form/1.pptx
+++ b/.lessons/59 Vendor Product And Related Features/4 Product- working with create form/1.pptx
@@ -6,8 +6,24 @@
   </p:sldMasterIdLst>
   <p:sldIdLst>
     <p:sldId id="413" r:id="rId2"/>
-    <p:sldId id="414" r:id="rId3"/>
-    <p:sldId id="415" r:id="rId4"/>
+    <p:sldId id="416" r:id="rId3"/>
+    <p:sldId id="417" r:id="rId4"/>
+    <p:sldId id="418" r:id="rId5"/>
+    <p:sldId id="419" r:id="rId6"/>
+    <p:sldId id="414" r:id="rId7"/>
+    <p:sldId id="420" r:id="rId8"/>
+    <p:sldId id="421" r:id="rId9"/>
+    <p:sldId id="424" r:id="rId10"/>
+    <p:sldId id="425" r:id="rId11"/>
+    <p:sldId id="426" r:id="rId12"/>
+    <p:sldId id="427" r:id="rId13"/>
+    <p:sldId id="422" r:id="rId14"/>
+    <p:sldId id="428" r:id="rId15"/>
+    <p:sldId id="429" r:id="rId16"/>
+    <p:sldId id="430" r:id="rId17"/>
+    <p:sldId id="431" r:id="rId18"/>
+    <p:sldId id="423" r:id="rId19"/>
+    <p:sldId id="415" r:id="rId20"/>
   </p:sldIdLst>
   <p:sldSz cx="12192000" cy="6858000"/>
   <p:notesSz cx="6858000" cy="9144000"/>
@@ -114,6 +130,34 @@
 </p:presentation>
 </file>
 
+<file path=ppt/ink/ink1.xml><?xml version="1.0" encoding="utf-8"?>
+<inkml:ink xmlns:inkml="http://www.w3.org/2003/InkML">
+  <inkml:definitions>
+    <inkml:context xml:id="ctx0">
+      <inkml:inkSource xml:id="inkSrc0">
+        <inkml:traceFormat>
+          <inkml:channel name="X" type="integer" min="-2.14748E9" max="2.14748E9" units="cm"/>
+          <inkml:channel name="Y" type="integer" min="-2.14748E9" max="2.14748E9" units="cm"/>
+          <inkml:channel name="F" type="integer" max="32767" units="dev"/>
+        </inkml:traceFormat>
+        <inkml:channelProperties>
+          <inkml:channelProperty channel="X" name="resolution" value="1000" units="1/cm"/>
+          <inkml:channelProperty channel="Y" name="resolution" value="1000" units="1/cm"/>
+          <inkml:channelProperty channel="F" name="resolution" value="0" units="1/dev"/>
+        </inkml:channelProperties>
+      </inkml:inkSource>
+      <inkml:timestamp xml:id="ts0" timeString="2025-12-18T08:53:45.555"/>
+    </inkml:context>
+    <inkml:brush xml:id="br0">
+      <inkml:brushProperty name="width" value="0.035" units="cm"/>
+      <inkml:brushProperty name="height" value="0.035" units="cm"/>
+      <inkml:brushProperty name="color" value="#E71224"/>
+    </inkml:brush>
+  </inkml:definitions>
+  <inkml:trace contextRef="#ctx0" brushRef="#br0">1 26 24575,'35'0'0,"51"0"0,49 0 0,99 0 0,83 0 0,40 0-1911,16 0 1911,10 0 0,-7 0 0,-25-5 0,-45 0 0,-66-1 204,-66 2-204,-53 1 0,-47 1-6484</inkml:trace>
+</inkml:ink>
+</file>
+
 <file path=ppt/slideLayouts/slideLayout1.xml><?xml version="1.0" encoding="utf-8"?>
 <p:sldLayout xmlns:a="http://schemas.openxmlformats.org/drawingml/2006/main" xmlns:r="http://schemas.openxmlformats.org/officeDocument/2006/relationships" xmlns:p="http://schemas.openxmlformats.org/presentationml/2006/main" type="title" preserve="1">
   <p:cSld name="Title Slide">
@@ -261,7 +305,7 @@
           <a:p>
             <a:fld id="{3E102D2E-813C-461C-9963-687A650C48C0}" type="datetimeFigureOut">
               <a:rPr lang="en-US" smtClean="0"/>
-              <a:t>12/15/2025</a:t>
+              <a:t>12/18/2025</a:t>
             </a:fld>
             <a:endParaRPr lang="en-US"/>
           </a:p>
@@ -459,7 +503,7 @@
           <a:p>
             <a:fld id="{3E102D2E-813C-461C-9963-687A650C48C0}" type="datetimeFigureOut">
               <a:rPr lang="en-US" smtClean="0"/>
-              <a:t>12/15/2025</a:t>
+              <a:t>12/18/2025</a:t>
             </a:fld>
             <a:endParaRPr lang="en-US"/>
           </a:p>
@@ -667,7 +711,7 @@
           <a:p>
             <a:fld id="{3E102D2E-813C-461C-9963-687A650C48C0}" type="datetimeFigureOut">
               <a:rPr lang="en-US" smtClean="0"/>
-              <a:t>12/15/2025</a:t>
+              <a:t>12/18/2025</a:t>
             </a:fld>
             <a:endParaRPr lang="en-US"/>
           </a:p>
@@ -865,7 +909,7 @@
           <a:p>
             <a:fld id="{3E102D2E-813C-461C-9963-687A650C48C0}" type="datetimeFigureOut">
               <a:rPr lang="en-US" smtClean="0"/>
-              <a:t>12/15/2025</a:t>
+              <a:t>12/18/2025</a:t>
             </a:fld>
             <a:endParaRPr lang="en-US"/>
           </a:p>
@@ -1140,7 +1184,7 @@
           <a:p>
             <a:fld id="{3E102D2E-813C-461C-9963-687A650C48C0}" type="datetimeFigureOut">
               <a:rPr lang="en-US" smtClean="0"/>
-              <a:t>12/15/2025</a:t>
+              <a:t>12/18/2025</a:t>
             </a:fld>
             <a:endParaRPr lang="en-US"/>
           </a:p>
@@ -1405,7 +1449,7 @@
           <a:p>
             <a:fld id="{3E102D2E-813C-461C-9963-687A650C48C0}" type="datetimeFigureOut">
               <a:rPr lang="en-US" smtClean="0"/>
-              <a:t>12/15/2025</a:t>
+              <a:t>12/18/2025</a:t>
             </a:fld>
             <a:endParaRPr lang="en-US"/>
           </a:p>
@@ -1817,7 +1861,7 @@
           <a:p>
             <a:fld id="{3E102D2E-813C-461C-9963-687A650C48C0}" type="datetimeFigureOut">
               <a:rPr lang="en-US" smtClean="0"/>
-              <a:t>12/15/2025</a:t>
+              <a:t>12/18/2025</a:t>
             </a:fld>
             <a:endParaRPr lang="en-US"/>
           </a:p>
@@ -1958,7 +2002,7 @@
           <a:p>
             <a:fld id="{3E102D2E-813C-461C-9963-687A650C48C0}" type="datetimeFigureOut">
               <a:rPr lang="en-US" smtClean="0"/>
-              <a:t>12/15/2025</a:t>
+              <a:t>12/18/2025</a:t>
             </a:fld>
             <a:endParaRPr lang="en-US"/>
           </a:p>
@@ -2071,7 +2115,7 @@
           <a:p>
             <a:fld id="{3E102D2E-813C-461C-9963-687A650C48C0}" type="datetimeFigureOut">
               <a:rPr lang="en-US" smtClean="0"/>
-              <a:t>12/15/2025</a:t>
+              <a:t>12/18/2025</a:t>
             </a:fld>
             <a:endParaRPr lang="en-US"/>
           </a:p>
@@ -2382,7 +2426,7 @@
           <a:p>
             <a:fld id="{3E102D2E-813C-461C-9963-687A650C48C0}" type="datetimeFigureOut">
               <a:rPr lang="en-US" smtClean="0"/>
-              <a:t>12/15/2025</a:t>
+              <a:t>12/18/2025</a:t>
             </a:fld>
             <a:endParaRPr lang="en-US"/>
           </a:p>
@@ -2670,7 +2714,7 @@
           <a:p>
             <a:fld id="{3E102D2E-813C-461C-9963-687A650C48C0}" type="datetimeFigureOut">
               <a:rPr lang="en-US" smtClean="0"/>
-              <a:t>12/15/2025</a:t>
+              <a:t>12/18/2025</a:t>
             </a:fld>
             <a:endParaRPr lang="en-US"/>
           </a:p>
@@ -2911,7 +2955,7 @@
           <a:p>
             <a:fld id="{3E102D2E-813C-461C-9963-687A650C48C0}" type="datetimeFigureOut">
               <a:rPr lang="en-US" smtClean="0"/>
-              <a:t>12/15/2025</a:t>
+              <a:t>12/18/2025</a:t>
             </a:fld>
             <a:endParaRPr lang="en-US"/>
           </a:p>
@@ -3349,7 +3393,7 @@
         <p:spPr>
           <a:xfrm>
             <a:off x="0" y="0"/>
-            <a:ext cx="12192000" cy="355354"/>
+            <a:ext cx="12192000" cy="955518"/>
           </a:xfrm>
           <a:prstGeom prst="rect">
             <a:avLst/>
@@ -3369,21 +3413,104 @@
               <a:buNone/>
             </a:pPr>
             <a:r>
-              <a:rPr kumimoji="0" lang="en-US" altLang="en-US" sz="1300" b="0" i="0" u="none" strike="noStrike" cap="none" normalizeH="0" baseline="0">
-                <a:ln>
-                  <a:noFill/>
-                </a:ln>
-                <a:solidFill>
-                  <a:schemeClr val="tx1"/>
-                </a:solidFill>
-                <a:effectLst/>
+              <a:rPr lang="en-US" altLang="en-US" sz="1300">
                 <a:latin typeface="Arial" panose="020B0604020202020204" pitchFamily="34" charset="0"/>
               </a:rPr>
-              <a:t>.</a:t>
-            </a:r>
-          </a:p>
-        </p:txBody>
-      </p:sp>
+              <a:t>index.blade.php</a:t>
+            </a:r>
+            <a:r>
+              <a:rPr lang="az-Latn-AZ" altLang="en-US" sz="1300">
+                <a:latin typeface="Arial" panose="020B0604020202020204" pitchFamily="34" charset="0"/>
+              </a:rPr>
+              <a:t> faylını copy </a:t>
+            </a:r>
+            <a:r>
+              <a:rPr lang="en-US" altLang="en-US" sz="1300">
+                <a:latin typeface="Arial" panose="020B0604020202020204" pitchFamily="34" charset="0"/>
+              </a:rPr>
+              <a:t>-&gt; </a:t>
+            </a:r>
+            <a:r>
+              <a:rPr lang="az-Latn-AZ" altLang="en-US" sz="1300">
+                <a:latin typeface="Arial" panose="020B0604020202020204" pitchFamily="34" charset="0"/>
+              </a:rPr>
+              <a:t>past edirik.</a:t>
+            </a:r>
+          </a:p>
+          <a:p>
+            <a:pPr>
+              <a:lnSpc>
+                <a:spcPct val="150000"/>
+              </a:lnSpc>
+              <a:buNone/>
+            </a:pPr>
+            <a:endParaRPr kumimoji="0" lang="az-Latn-AZ" altLang="en-US" sz="1300" b="0" i="0" u="none" strike="noStrike" cap="none" normalizeH="0" baseline="0">
+              <a:ln>
+                <a:noFill/>
+              </a:ln>
+              <a:solidFill>
+                <a:schemeClr val="tx1"/>
+              </a:solidFill>
+              <a:effectLst/>
+              <a:latin typeface="Arial" panose="020B0604020202020204" pitchFamily="34" charset="0"/>
+            </a:endParaRPr>
+          </a:p>
+          <a:p>
+            <a:pPr>
+              <a:lnSpc>
+                <a:spcPct val="150000"/>
+              </a:lnSpc>
+              <a:buNone/>
+            </a:pPr>
+            <a:r>
+              <a:rPr lang="az-Latn-AZ" altLang="en-US" sz="1300">
+                <a:latin typeface="Arial" panose="020B0604020202020204" pitchFamily="34" charset="0"/>
+              </a:rPr>
+              <a:t>Adını create.blade.php qoyuruq.</a:t>
+            </a:r>
+            <a:endParaRPr kumimoji="0" lang="en-US" altLang="en-US" sz="1300" b="0" i="0" u="none" strike="noStrike" cap="none" normalizeH="0" baseline="0">
+              <a:ln>
+                <a:noFill/>
+              </a:ln>
+              <a:solidFill>
+                <a:schemeClr val="tx1"/>
+              </a:solidFill>
+              <a:effectLst/>
+              <a:latin typeface="Arial" panose="020B0604020202020204" pitchFamily="34" charset="0"/>
+            </a:endParaRPr>
+          </a:p>
+        </p:txBody>
+      </p:sp>
+      <p:pic>
+        <p:nvPicPr>
+          <p:cNvPr id="4" name="Picture 3">
+            <a:extLst>
+              <a:ext uri="{FF2B5EF4-FFF2-40B4-BE49-F238E27FC236}">
+                <a16:creationId xmlns:a16="http://schemas.microsoft.com/office/drawing/2014/main" id="{2E06AFF6-2008-AB02-E9AB-8D54C99F69CD}"/>
+              </a:ext>
+            </a:extLst>
+          </p:cNvPr>
+          <p:cNvPicPr>
+            <a:picLocks noChangeAspect="1"/>
+          </p:cNvPicPr>
+          <p:nvPr/>
+        </p:nvPicPr>
+        <p:blipFill>
+          <a:blip r:embed="rId2"/>
+          <a:stretch>
+            <a:fillRect/>
+          </a:stretch>
+        </p:blipFill>
+        <p:spPr>
+          <a:xfrm>
+            <a:off x="6735912" y="0"/>
+            <a:ext cx="5456088" cy="6858000"/>
+          </a:xfrm>
+          <a:prstGeom prst="rect">
+            <a:avLst/>
+          </a:prstGeom>
+        </p:spPr>
+      </p:pic>
     </p:spTree>
     <p:extLst>
       <p:ext uri="{BB962C8B-B14F-4D97-AF65-F5344CB8AC3E}">
@@ -3397,7 +3524,1867 @@
 </p:sld>
 </file>
 
+<file path=ppt/slides/slide10.xml><?xml version="1.0" encoding="utf-8"?>
+<p:sld xmlns:a="http://schemas.openxmlformats.org/drawingml/2006/main" xmlns:r="http://schemas.openxmlformats.org/officeDocument/2006/relationships" xmlns:p="http://schemas.openxmlformats.org/presentationml/2006/main">
+  <p:cSld>
+    <p:spTree>
+      <p:nvGrpSpPr>
+        <p:cNvPr id="1" name="">
+          <a:extLst>
+            <a:ext uri="{FF2B5EF4-FFF2-40B4-BE49-F238E27FC236}">
+              <a16:creationId xmlns:a16="http://schemas.microsoft.com/office/drawing/2014/main" id="{75E53852-126A-D83D-AD80-61D52A8C4051}"/>
+            </a:ext>
+          </a:extLst>
+        </p:cNvPr>
+        <p:cNvGrpSpPr/>
+        <p:nvPr/>
+      </p:nvGrpSpPr>
+      <p:grpSpPr>
+        <a:xfrm>
+          <a:off x="0" y="0"/>
+          <a:ext cx="0" cy="0"/>
+          <a:chOff x="0" y="0"/>
+          <a:chExt cx="0" cy="0"/>
+        </a:xfrm>
+      </p:grpSpPr>
+      <p:sp>
+        <p:nvSpPr>
+          <p:cNvPr id="3" name="TextBox 2">
+            <a:extLst>
+              <a:ext uri="{FF2B5EF4-FFF2-40B4-BE49-F238E27FC236}">
+                <a16:creationId xmlns:a16="http://schemas.microsoft.com/office/drawing/2014/main" id="{4B573A99-B72E-778E-2095-60D5D35FCABC}"/>
+              </a:ext>
+            </a:extLst>
+          </p:cNvPr>
+          <p:cNvSpPr txBox="1"/>
+          <p:nvPr/>
+        </p:nvSpPr>
+        <p:spPr>
+          <a:xfrm>
+            <a:off x="0" y="0"/>
+            <a:ext cx="12192000" cy="355354"/>
+          </a:xfrm>
+          <a:prstGeom prst="rect">
+            <a:avLst/>
+          </a:prstGeom>
+          <a:noFill/>
+        </p:spPr>
+        <p:txBody>
+          <a:bodyPr wrap="square">
+            <a:spAutoFit/>
+          </a:bodyPr>
+          <a:lstStyle/>
+          <a:p>
+            <a:pPr>
+              <a:lnSpc>
+                <a:spcPct val="150000"/>
+              </a:lnSpc>
+              <a:buNone/>
+            </a:pPr>
+            <a:r>
+              <a:rPr kumimoji="0" lang="en-US" altLang="en-US" sz="1300" b="0" i="0" u="none" strike="noStrike" cap="none" normalizeH="0" baseline="0">
+                <a:ln>
+                  <a:noFill/>
+                </a:ln>
+                <a:solidFill>
+                  <a:schemeClr val="tx1"/>
+                </a:solidFill>
+                <a:effectLst/>
+                <a:latin typeface="Arial" panose="020B0604020202020204" pitchFamily="34" charset="0"/>
+              </a:rPr>
+              <a:t>.</a:t>
+            </a:r>
+          </a:p>
+        </p:txBody>
+      </p:sp>
+      <p:pic>
+        <p:nvPicPr>
+          <p:cNvPr id="4" name="Picture 3">
+            <a:extLst>
+              <a:ext uri="{FF2B5EF4-FFF2-40B4-BE49-F238E27FC236}">
+                <a16:creationId xmlns:a16="http://schemas.microsoft.com/office/drawing/2014/main" id="{0078A88D-ACB3-4956-CAF4-D49E7AB6AB34}"/>
+              </a:ext>
+            </a:extLst>
+          </p:cNvPr>
+          <p:cNvPicPr>
+            <a:picLocks noChangeAspect="1"/>
+          </p:cNvPicPr>
+          <p:nvPr/>
+        </p:nvPicPr>
+        <p:blipFill>
+          <a:blip r:embed="rId2"/>
+          <a:stretch>
+            <a:fillRect/>
+          </a:stretch>
+        </p:blipFill>
+        <p:spPr>
+          <a:xfrm>
+            <a:off x="0" y="207687"/>
+            <a:ext cx="12192000" cy="6442626"/>
+          </a:xfrm>
+          <a:prstGeom prst="rect">
+            <a:avLst/>
+          </a:prstGeom>
+        </p:spPr>
+      </p:pic>
+    </p:spTree>
+    <p:extLst>
+      <p:ext uri="{BB962C8B-B14F-4D97-AF65-F5344CB8AC3E}">
+        <p14:creationId xmlns:p14="http://schemas.microsoft.com/office/powerpoint/2010/main" val="864432434"/>
+      </p:ext>
+    </p:extLst>
+  </p:cSld>
+  <p:clrMapOvr>
+    <a:masterClrMapping/>
+  </p:clrMapOvr>
+</p:sld>
+</file>
+
+<file path=ppt/slides/slide11.xml><?xml version="1.0" encoding="utf-8"?>
+<p:sld xmlns:a="http://schemas.openxmlformats.org/drawingml/2006/main" xmlns:r="http://schemas.openxmlformats.org/officeDocument/2006/relationships" xmlns:p="http://schemas.openxmlformats.org/presentationml/2006/main">
+  <p:cSld>
+    <p:spTree>
+      <p:nvGrpSpPr>
+        <p:cNvPr id="1" name="">
+          <a:extLst>
+            <a:ext uri="{FF2B5EF4-FFF2-40B4-BE49-F238E27FC236}">
+              <a16:creationId xmlns:a16="http://schemas.microsoft.com/office/drawing/2014/main" id="{BA0C9F97-3D20-16DE-5F39-6337A02DAC42}"/>
+            </a:ext>
+          </a:extLst>
+        </p:cNvPr>
+        <p:cNvGrpSpPr/>
+        <p:nvPr/>
+      </p:nvGrpSpPr>
+      <p:grpSpPr>
+        <a:xfrm>
+          <a:off x="0" y="0"/>
+          <a:ext cx="0" cy="0"/>
+          <a:chOff x="0" y="0"/>
+          <a:chExt cx="0" cy="0"/>
+        </a:xfrm>
+      </p:grpSpPr>
+      <p:sp>
+        <p:nvSpPr>
+          <p:cNvPr id="3" name="TextBox 2">
+            <a:extLst>
+              <a:ext uri="{FF2B5EF4-FFF2-40B4-BE49-F238E27FC236}">
+                <a16:creationId xmlns:a16="http://schemas.microsoft.com/office/drawing/2014/main" id="{22788946-EFC6-BFFF-4E61-5FA239CF0B54}"/>
+              </a:ext>
+            </a:extLst>
+          </p:cNvPr>
+          <p:cNvSpPr txBox="1"/>
+          <p:nvPr/>
+        </p:nvSpPr>
+        <p:spPr>
+          <a:xfrm>
+            <a:off x="0" y="0"/>
+            <a:ext cx="12192000" cy="355354"/>
+          </a:xfrm>
+          <a:prstGeom prst="rect">
+            <a:avLst/>
+          </a:prstGeom>
+          <a:noFill/>
+        </p:spPr>
+        <p:txBody>
+          <a:bodyPr wrap="square">
+            <a:spAutoFit/>
+          </a:bodyPr>
+          <a:lstStyle/>
+          <a:p>
+            <a:pPr>
+              <a:lnSpc>
+                <a:spcPct val="150000"/>
+              </a:lnSpc>
+              <a:buNone/>
+            </a:pPr>
+            <a:r>
+              <a:rPr kumimoji="0" lang="en-US" altLang="en-US" sz="1300" b="0" i="0" u="none" strike="noStrike" cap="none" normalizeH="0" baseline="0">
+                <a:ln>
+                  <a:noFill/>
+                </a:ln>
+                <a:solidFill>
+                  <a:schemeClr val="tx1"/>
+                </a:solidFill>
+                <a:effectLst/>
+                <a:latin typeface="Arial" panose="020B0604020202020204" pitchFamily="34" charset="0"/>
+              </a:rPr>
+              <a:t>.</a:t>
+            </a:r>
+          </a:p>
+        </p:txBody>
+      </p:sp>
+      <p:pic>
+        <p:nvPicPr>
+          <p:cNvPr id="4" name="Picture 3">
+            <a:extLst>
+              <a:ext uri="{FF2B5EF4-FFF2-40B4-BE49-F238E27FC236}">
+                <a16:creationId xmlns:a16="http://schemas.microsoft.com/office/drawing/2014/main" id="{E8A8464D-63E6-F3D1-DD33-F6A647628DF4}"/>
+              </a:ext>
+            </a:extLst>
+          </p:cNvPr>
+          <p:cNvPicPr>
+            <a:picLocks noChangeAspect="1"/>
+          </p:cNvPicPr>
+          <p:nvPr/>
+        </p:nvPicPr>
+        <p:blipFill>
+          <a:blip r:embed="rId2"/>
+          <a:stretch>
+            <a:fillRect/>
+          </a:stretch>
+        </p:blipFill>
+        <p:spPr>
+          <a:xfrm>
+            <a:off x="1655164" y="0"/>
+            <a:ext cx="8881671" cy="6858000"/>
+          </a:xfrm>
+          <a:prstGeom prst="rect">
+            <a:avLst/>
+          </a:prstGeom>
+        </p:spPr>
+      </p:pic>
+    </p:spTree>
+    <p:extLst>
+      <p:ext uri="{BB962C8B-B14F-4D97-AF65-F5344CB8AC3E}">
+        <p14:creationId xmlns:p14="http://schemas.microsoft.com/office/powerpoint/2010/main" val="1656569132"/>
+      </p:ext>
+    </p:extLst>
+  </p:cSld>
+  <p:clrMapOvr>
+    <a:masterClrMapping/>
+  </p:clrMapOvr>
+</p:sld>
+</file>
+
+<file path=ppt/slides/slide12.xml><?xml version="1.0" encoding="utf-8"?>
+<p:sld xmlns:a="http://schemas.openxmlformats.org/drawingml/2006/main" xmlns:r="http://schemas.openxmlformats.org/officeDocument/2006/relationships" xmlns:p="http://schemas.openxmlformats.org/presentationml/2006/main">
+  <p:cSld>
+    <p:spTree>
+      <p:nvGrpSpPr>
+        <p:cNvPr id="1" name="">
+          <a:extLst>
+            <a:ext uri="{FF2B5EF4-FFF2-40B4-BE49-F238E27FC236}">
+              <a16:creationId xmlns:a16="http://schemas.microsoft.com/office/drawing/2014/main" id="{8CB7F57B-ED48-7297-FB3F-10987CB8A82A}"/>
+            </a:ext>
+          </a:extLst>
+        </p:cNvPr>
+        <p:cNvGrpSpPr/>
+        <p:nvPr/>
+      </p:nvGrpSpPr>
+      <p:grpSpPr>
+        <a:xfrm>
+          <a:off x="0" y="0"/>
+          <a:ext cx="0" cy="0"/>
+          <a:chOff x="0" y="0"/>
+          <a:chExt cx="0" cy="0"/>
+        </a:xfrm>
+      </p:grpSpPr>
+      <p:sp>
+        <p:nvSpPr>
+          <p:cNvPr id="3" name="TextBox 2">
+            <a:extLst>
+              <a:ext uri="{FF2B5EF4-FFF2-40B4-BE49-F238E27FC236}">
+                <a16:creationId xmlns:a16="http://schemas.microsoft.com/office/drawing/2014/main" id="{2AF98384-878E-0803-AD44-776949FD1323}"/>
+              </a:ext>
+            </a:extLst>
+          </p:cNvPr>
+          <p:cNvSpPr txBox="1"/>
+          <p:nvPr/>
+        </p:nvSpPr>
+        <p:spPr>
+          <a:xfrm>
+            <a:off x="0" y="0"/>
+            <a:ext cx="12192000" cy="355354"/>
+          </a:xfrm>
+          <a:prstGeom prst="rect">
+            <a:avLst/>
+          </a:prstGeom>
+          <a:noFill/>
+        </p:spPr>
+        <p:txBody>
+          <a:bodyPr wrap="square">
+            <a:spAutoFit/>
+          </a:bodyPr>
+          <a:lstStyle/>
+          <a:p>
+            <a:pPr>
+              <a:lnSpc>
+                <a:spcPct val="150000"/>
+              </a:lnSpc>
+              <a:buNone/>
+            </a:pPr>
+            <a:r>
+              <a:rPr kumimoji="0" lang="en-US" altLang="en-US" sz="1300" b="0" i="0" u="none" strike="noStrike" cap="none" normalizeH="0" baseline="0">
+                <a:ln>
+                  <a:noFill/>
+                </a:ln>
+                <a:solidFill>
+                  <a:schemeClr val="tx1"/>
+                </a:solidFill>
+                <a:effectLst/>
+                <a:latin typeface="Arial" panose="020B0604020202020204" pitchFamily="34" charset="0"/>
+              </a:rPr>
+              <a:t>.</a:t>
+            </a:r>
+          </a:p>
+        </p:txBody>
+      </p:sp>
+      <p:pic>
+        <p:nvPicPr>
+          <p:cNvPr id="8" name="Picture 7">
+            <a:extLst>
+              <a:ext uri="{FF2B5EF4-FFF2-40B4-BE49-F238E27FC236}">
+                <a16:creationId xmlns:a16="http://schemas.microsoft.com/office/drawing/2014/main" id="{430E40EF-C660-AA24-AE56-8BE347307E71}"/>
+              </a:ext>
+            </a:extLst>
+          </p:cNvPr>
+          <p:cNvPicPr>
+            <a:picLocks noChangeAspect="1"/>
+          </p:cNvPicPr>
+          <p:nvPr/>
+        </p:nvPicPr>
+        <p:blipFill>
+          <a:blip r:embed="rId2"/>
+          <a:stretch>
+            <a:fillRect/>
+          </a:stretch>
+        </p:blipFill>
+        <p:spPr>
+          <a:xfrm>
+            <a:off x="1892824" y="0"/>
+            <a:ext cx="8406352" cy="6858000"/>
+          </a:xfrm>
+          <a:prstGeom prst="rect">
+            <a:avLst/>
+          </a:prstGeom>
+        </p:spPr>
+      </p:pic>
+    </p:spTree>
+    <p:extLst>
+      <p:ext uri="{BB962C8B-B14F-4D97-AF65-F5344CB8AC3E}">
+        <p14:creationId xmlns:p14="http://schemas.microsoft.com/office/powerpoint/2010/main" val="634334284"/>
+      </p:ext>
+    </p:extLst>
+  </p:cSld>
+  <p:clrMapOvr>
+    <a:masterClrMapping/>
+  </p:clrMapOvr>
+</p:sld>
+</file>
+
+<file path=ppt/slides/slide13.xml><?xml version="1.0" encoding="utf-8"?>
+<p:sld xmlns:a="http://schemas.openxmlformats.org/drawingml/2006/main" xmlns:r="http://schemas.openxmlformats.org/officeDocument/2006/relationships" xmlns:p="http://schemas.openxmlformats.org/presentationml/2006/main">
+  <p:cSld>
+    <p:spTree>
+      <p:nvGrpSpPr>
+        <p:cNvPr id="1" name="">
+          <a:extLst>
+            <a:ext uri="{FF2B5EF4-FFF2-40B4-BE49-F238E27FC236}">
+              <a16:creationId xmlns:a16="http://schemas.microsoft.com/office/drawing/2014/main" id="{114129DC-75F7-4795-FA7B-ACC7B006DF1B}"/>
+            </a:ext>
+          </a:extLst>
+        </p:cNvPr>
+        <p:cNvGrpSpPr/>
+        <p:nvPr/>
+      </p:nvGrpSpPr>
+      <p:grpSpPr>
+        <a:xfrm>
+          <a:off x="0" y="0"/>
+          <a:ext cx="0" cy="0"/>
+          <a:chOff x="0" y="0"/>
+          <a:chExt cx="0" cy="0"/>
+        </a:xfrm>
+      </p:grpSpPr>
+      <p:sp>
+        <p:nvSpPr>
+          <p:cNvPr id="3" name="TextBox 2">
+            <a:extLst>
+              <a:ext uri="{FF2B5EF4-FFF2-40B4-BE49-F238E27FC236}">
+                <a16:creationId xmlns:a16="http://schemas.microsoft.com/office/drawing/2014/main" id="{078B2D0C-3AEA-23CC-E116-057A53617B15}"/>
+              </a:ext>
+            </a:extLst>
+          </p:cNvPr>
+          <p:cNvSpPr txBox="1"/>
+          <p:nvPr/>
+        </p:nvSpPr>
+        <p:spPr>
+          <a:xfrm>
+            <a:off x="0" y="0"/>
+            <a:ext cx="12192000" cy="355354"/>
+          </a:xfrm>
+          <a:prstGeom prst="rect">
+            <a:avLst/>
+          </a:prstGeom>
+          <a:noFill/>
+        </p:spPr>
+        <p:txBody>
+          <a:bodyPr wrap="square">
+            <a:spAutoFit/>
+          </a:bodyPr>
+          <a:lstStyle/>
+          <a:p>
+            <a:pPr>
+              <a:lnSpc>
+                <a:spcPct val="150000"/>
+              </a:lnSpc>
+              <a:buNone/>
+            </a:pPr>
+            <a:r>
+              <a:rPr kumimoji="0" lang="az-Latn-AZ" altLang="en-US" sz="1300" b="0" i="0" u="none" strike="noStrike" cap="none" normalizeH="0" baseline="0">
+                <a:ln>
+                  <a:noFill/>
+                </a:ln>
+                <a:solidFill>
+                  <a:schemeClr val="tx1"/>
+                </a:solidFill>
+                <a:effectLst/>
+                <a:latin typeface="Arial" panose="020B0604020202020204" pitchFamily="34" charset="0"/>
+              </a:rPr>
+              <a:t>Hal hazırki nəticə belədir. Növbəti slaydda həmin tarixi </a:t>
+            </a:r>
+            <a:r>
+              <a:rPr lang="az-Latn-AZ" altLang="en-US" sz="1300">
+                <a:latin typeface="Arial" panose="020B0604020202020204" pitchFamily="34" charset="0"/>
+              </a:rPr>
+              <a:t>fərqli formatda necə göstərmək olar ona baxaq...</a:t>
+            </a:r>
+            <a:endParaRPr kumimoji="0" lang="en-US" altLang="en-US" sz="1300" b="0" i="0" u="none" strike="noStrike" cap="none" normalizeH="0" baseline="0">
+              <a:ln>
+                <a:noFill/>
+              </a:ln>
+              <a:solidFill>
+                <a:schemeClr val="tx1"/>
+              </a:solidFill>
+              <a:effectLst/>
+              <a:latin typeface="Arial" panose="020B0604020202020204" pitchFamily="34" charset="0"/>
+            </a:endParaRPr>
+          </a:p>
+        </p:txBody>
+      </p:sp>
+      <p:pic>
+        <p:nvPicPr>
+          <p:cNvPr id="4" name="Picture 3">
+            <a:extLst>
+              <a:ext uri="{FF2B5EF4-FFF2-40B4-BE49-F238E27FC236}">
+                <a16:creationId xmlns:a16="http://schemas.microsoft.com/office/drawing/2014/main" id="{2E6A955B-EE28-7418-BE6B-34BC2DDDE63A}"/>
+              </a:ext>
+            </a:extLst>
+          </p:cNvPr>
+          <p:cNvPicPr>
+            <a:picLocks noChangeAspect="1"/>
+          </p:cNvPicPr>
+          <p:nvPr/>
+        </p:nvPicPr>
+        <p:blipFill>
+          <a:blip r:embed="rId2"/>
+          <a:stretch>
+            <a:fillRect/>
+          </a:stretch>
+        </p:blipFill>
+        <p:spPr>
+          <a:xfrm>
+            <a:off x="1637678" y="1166497"/>
+            <a:ext cx="8916644" cy="4525006"/>
+          </a:xfrm>
+          <a:prstGeom prst="rect">
+            <a:avLst/>
+          </a:prstGeom>
+          <a:solidFill>
+            <a:srgbClr val="FFFFFF">
+              <a:shade val="85000"/>
+            </a:srgbClr>
+          </a:solidFill>
+          <a:ln w="88900" cap="sq">
+            <a:solidFill>
+              <a:srgbClr val="FFFFFF"/>
+            </a:solidFill>
+            <a:miter lim="800000"/>
+          </a:ln>
+          <a:effectLst>
+            <a:outerShdw blurRad="55000" dist="18000" dir="5400000" algn="tl" rotWithShape="0">
+              <a:srgbClr val="000000">
+                <a:alpha val="40000"/>
+              </a:srgbClr>
+            </a:outerShdw>
+          </a:effectLst>
+          <a:scene3d>
+            <a:camera prst="orthographicFront"/>
+            <a:lightRig rig="twoPt" dir="t">
+              <a:rot lat="0" lon="0" rev="7200000"/>
+            </a:lightRig>
+          </a:scene3d>
+          <a:sp3d>
+            <a:bevelT w="25400" h="19050"/>
+            <a:contourClr>
+              <a:srgbClr val="FFFFFF"/>
+            </a:contourClr>
+          </a:sp3d>
+        </p:spPr>
+      </p:pic>
+    </p:spTree>
+    <p:extLst>
+      <p:ext uri="{BB962C8B-B14F-4D97-AF65-F5344CB8AC3E}">
+        <p14:creationId xmlns:p14="http://schemas.microsoft.com/office/powerpoint/2010/main" val="1801000417"/>
+      </p:ext>
+    </p:extLst>
+  </p:cSld>
+  <p:clrMapOvr>
+    <a:masterClrMapping/>
+  </p:clrMapOvr>
+</p:sld>
+</file>
+
+<file path=ppt/slides/slide14.xml><?xml version="1.0" encoding="utf-8"?>
+<p:sld xmlns:a="http://schemas.openxmlformats.org/drawingml/2006/main" xmlns:r="http://schemas.openxmlformats.org/officeDocument/2006/relationships" xmlns:p="http://schemas.openxmlformats.org/presentationml/2006/main">
+  <p:cSld>
+    <p:spTree>
+      <p:nvGrpSpPr>
+        <p:cNvPr id="1" name="">
+          <a:extLst>
+            <a:ext uri="{FF2B5EF4-FFF2-40B4-BE49-F238E27FC236}">
+              <a16:creationId xmlns:a16="http://schemas.microsoft.com/office/drawing/2014/main" id="{305FF150-7273-680A-1CD6-113AF7E7BD34}"/>
+            </a:ext>
+          </a:extLst>
+        </p:cNvPr>
+        <p:cNvGrpSpPr/>
+        <p:nvPr/>
+      </p:nvGrpSpPr>
+      <p:grpSpPr>
+        <a:xfrm>
+          <a:off x="0" y="0"/>
+          <a:ext cx="0" cy="0"/>
+          <a:chOff x="0" y="0"/>
+          <a:chExt cx="0" cy="0"/>
+        </a:xfrm>
+      </p:grpSpPr>
+      <p:sp>
+        <p:nvSpPr>
+          <p:cNvPr id="3" name="TextBox 2">
+            <a:extLst>
+              <a:ext uri="{FF2B5EF4-FFF2-40B4-BE49-F238E27FC236}">
+                <a16:creationId xmlns:a16="http://schemas.microsoft.com/office/drawing/2014/main" id="{C2DF1AD2-B582-F87B-2575-290B7281B540}"/>
+              </a:ext>
+            </a:extLst>
+          </p:cNvPr>
+          <p:cNvSpPr txBox="1"/>
+          <p:nvPr/>
+        </p:nvSpPr>
+        <p:spPr>
+          <a:xfrm>
+            <a:off x="0" y="0"/>
+            <a:ext cx="12192000" cy="355354"/>
+          </a:xfrm>
+          <a:prstGeom prst="rect">
+            <a:avLst/>
+          </a:prstGeom>
+          <a:noFill/>
+        </p:spPr>
+        <p:txBody>
+          <a:bodyPr wrap="square">
+            <a:spAutoFit/>
+          </a:bodyPr>
+          <a:lstStyle/>
+          <a:p>
+            <a:pPr>
+              <a:lnSpc>
+                <a:spcPct val="150000"/>
+              </a:lnSpc>
+              <a:buNone/>
+            </a:pPr>
+            <a:r>
+              <a:rPr kumimoji="0" lang="en-US" altLang="en-US" sz="1300" b="0" i="0" u="none" strike="noStrike" cap="none" normalizeH="0" baseline="0">
+                <a:ln>
+                  <a:noFill/>
+                </a:ln>
+                <a:solidFill>
+                  <a:schemeClr val="tx1"/>
+                </a:solidFill>
+                <a:effectLst/>
+                <a:latin typeface="Arial" panose="020B0604020202020204" pitchFamily="34" charset="0"/>
+              </a:rPr>
+              <a:t>.</a:t>
+            </a:r>
+          </a:p>
+        </p:txBody>
+      </p:sp>
+      <p:pic>
+        <p:nvPicPr>
+          <p:cNvPr id="4" name="Picture 3">
+            <a:extLst>
+              <a:ext uri="{FF2B5EF4-FFF2-40B4-BE49-F238E27FC236}">
+                <a16:creationId xmlns:a16="http://schemas.microsoft.com/office/drawing/2014/main" id="{B663DFF1-8E97-75C2-3CC2-DD383FAD0228}"/>
+              </a:ext>
+            </a:extLst>
+          </p:cNvPr>
+          <p:cNvPicPr>
+            <a:picLocks noChangeAspect="1"/>
+          </p:cNvPicPr>
+          <p:nvPr/>
+        </p:nvPicPr>
+        <p:blipFill>
+          <a:blip r:embed="rId2"/>
+          <a:stretch>
+            <a:fillRect/>
+          </a:stretch>
+        </p:blipFill>
+        <p:spPr>
+          <a:xfrm>
+            <a:off x="3090443" y="342469"/>
+            <a:ext cx="6011114" cy="6173061"/>
+          </a:xfrm>
+          <a:prstGeom prst="rect">
+            <a:avLst/>
+          </a:prstGeom>
+        </p:spPr>
+      </p:pic>
+    </p:spTree>
+    <p:extLst>
+      <p:ext uri="{BB962C8B-B14F-4D97-AF65-F5344CB8AC3E}">
+        <p14:creationId xmlns:p14="http://schemas.microsoft.com/office/powerpoint/2010/main" val="1445635327"/>
+      </p:ext>
+    </p:extLst>
+  </p:cSld>
+  <p:clrMapOvr>
+    <a:masterClrMapping/>
+  </p:clrMapOvr>
+</p:sld>
+</file>
+
+<file path=ppt/slides/slide15.xml><?xml version="1.0" encoding="utf-8"?>
+<p:sld xmlns:a="http://schemas.openxmlformats.org/drawingml/2006/main" xmlns:r="http://schemas.openxmlformats.org/officeDocument/2006/relationships" xmlns:p="http://schemas.openxmlformats.org/presentationml/2006/main">
+  <p:cSld>
+    <p:spTree>
+      <p:nvGrpSpPr>
+        <p:cNvPr id="1" name="">
+          <a:extLst>
+            <a:ext uri="{FF2B5EF4-FFF2-40B4-BE49-F238E27FC236}">
+              <a16:creationId xmlns:a16="http://schemas.microsoft.com/office/drawing/2014/main" id="{63272916-F458-5EBE-B6A5-FAA137CFF6AD}"/>
+            </a:ext>
+          </a:extLst>
+        </p:cNvPr>
+        <p:cNvGrpSpPr/>
+        <p:nvPr/>
+      </p:nvGrpSpPr>
+      <p:grpSpPr>
+        <a:xfrm>
+          <a:off x="0" y="0"/>
+          <a:ext cx="0" cy="0"/>
+          <a:chOff x="0" y="0"/>
+          <a:chExt cx="0" cy="0"/>
+        </a:xfrm>
+      </p:grpSpPr>
+      <p:sp>
+        <p:nvSpPr>
+          <p:cNvPr id="3" name="TextBox 2">
+            <a:extLst>
+              <a:ext uri="{FF2B5EF4-FFF2-40B4-BE49-F238E27FC236}">
+                <a16:creationId xmlns:a16="http://schemas.microsoft.com/office/drawing/2014/main" id="{B4D33F34-750A-E6DC-EF0C-E20547820480}"/>
+              </a:ext>
+            </a:extLst>
+          </p:cNvPr>
+          <p:cNvSpPr txBox="1"/>
+          <p:nvPr/>
+        </p:nvSpPr>
+        <p:spPr>
+          <a:xfrm>
+            <a:off x="0" y="0"/>
+            <a:ext cx="12192000" cy="355354"/>
+          </a:xfrm>
+          <a:prstGeom prst="rect">
+            <a:avLst/>
+          </a:prstGeom>
+          <a:noFill/>
+        </p:spPr>
+        <p:txBody>
+          <a:bodyPr wrap="square">
+            <a:spAutoFit/>
+          </a:bodyPr>
+          <a:lstStyle/>
+          <a:p>
+            <a:pPr>
+              <a:lnSpc>
+                <a:spcPct val="150000"/>
+              </a:lnSpc>
+              <a:buNone/>
+            </a:pPr>
+            <a:r>
+              <a:rPr kumimoji="0" lang="en-US" altLang="en-US" sz="1300" b="0" i="0" u="none" strike="noStrike" cap="none" normalizeH="0" baseline="0">
+                <a:ln>
+                  <a:noFill/>
+                </a:ln>
+                <a:solidFill>
+                  <a:schemeClr val="tx1"/>
+                </a:solidFill>
+                <a:effectLst/>
+                <a:latin typeface="Arial" panose="020B0604020202020204" pitchFamily="34" charset="0"/>
+              </a:rPr>
+              <a:t>.</a:t>
+            </a:r>
+          </a:p>
+        </p:txBody>
+      </p:sp>
+      <p:pic>
+        <p:nvPicPr>
+          <p:cNvPr id="4" name="Picture 3">
+            <a:extLst>
+              <a:ext uri="{FF2B5EF4-FFF2-40B4-BE49-F238E27FC236}">
+                <a16:creationId xmlns:a16="http://schemas.microsoft.com/office/drawing/2014/main" id="{CD301625-28B0-C595-3D02-1FF67BD3B351}"/>
+              </a:ext>
+            </a:extLst>
+          </p:cNvPr>
+          <p:cNvPicPr>
+            <a:picLocks noChangeAspect="1"/>
+          </p:cNvPicPr>
+          <p:nvPr/>
+        </p:nvPicPr>
+        <p:blipFill>
+          <a:blip r:embed="rId2"/>
+          <a:stretch>
+            <a:fillRect/>
+          </a:stretch>
+        </p:blipFill>
+        <p:spPr>
+          <a:xfrm>
+            <a:off x="1756757" y="1604708"/>
+            <a:ext cx="8678486" cy="3648584"/>
+          </a:xfrm>
+          <a:prstGeom prst="rect">
+            <a:avLst/>
+          </a:prstGeom>
+          <a:solidFill>
+            <a:srgbClr val="FFFFFF">
+              <a:shade val="85000"/>
+            </a:srgbClr>
+          </a:solidFill>
+          <a:ln w="88900" cap="sq">
+            <a:solidFill>
+              <a:srgbClr val="FFFFFF"/>
+            </a:solidFill>
+            <a:miter lim="800000"/>
+          </a:ln>
+          <a:effectLst>
+            <a:outerShdw blurRad="55000" dist="18000" dir="5400000" algn="tl" rotWithShape="0">
+              <a:srgbClr val="000000">
+                <a:alpha val="40000"/>
+              </a:srgbClr>
+            </a:outerShdw>
+          </a:effectLst>
+          <a:scene3d>
+            <a:camera prst="orthographicFront"/>
+            <a:lightRig rig="twoPt" dir="t">
+              <a:rot lat="0" lon="0" rev="7200000"/>
+            </a:lightRig>
+          </a:scene3d>
+          <a:sp3d>
+            <a:bevelT w="25400" h="19050"/>
+            <a:contourClr>
+              <a:srgbClr val="FFFFFF"/>
+            </a:contourClr>
+          </a:sp3d>
+        </p:spPr>
+      </p:pic>
+    </p:spTree>
+    <p:extLst>
+      <p:ext uri="{BB962C8B-B14F-4D97-AF65-F5344CB8AC3E}">
+        <p14:creationId xmlns:p14="http://schemas.microsoft.com/office/powerpoint/2010/main" val="2818419727"/>
+      </p:ext>
+    </p:extLst>
+  </p:cSld>
+  <p:clrMapOvr>
+    <a:masterClrMapping/>
+  </p:clrMapOvr>
+</p:sld>
+</file>
+
+<file path=ppt/slides/slide16.xml><?xml version="1.0" encoding="utf-8"?>
+<p:sld xmlns:a="http://schemas.openxmlformats.org/drawingml/2006/main" xmlns:r="http://schemas.openxmlformats.org/officeDocument/2006/relationships" xmlns:p="http://schemas.openxmlformats.org/presentationml/2006/main">
+  <p:cSld>
+    <p:spTree>
+      <p:nvGrpSpPr>
+        <p:cNvPr id="1" name="">
+          <a:extLst>
+            <a:ext uri="{FF2B5EF4-FFF2-40B4-BE49-F238E27FC236}">
+              <a16:creationId xmlns:a16="http://schemas.microsoft.com/office/drawing/2014/main" id="{EA3C262D-CCF3-25A3-420C-BB66DFC2D48F}"/>
+            </a:ext>
+          </a:extLst>
+        </p:cNvPr>
+        <p:cNvGrpSpPr/>
+        <p:nvPr/>
+      </p:nvGrpSpPr>
+      <p:grpSpPr>
+        <a:xfrm>
+          <a:off x="0" y="0"/>
+          <a:ext cx="0" cy="0"/>
+          <a:chOff x="0" y="0"/>
+          <a:chExt cx="0" cy="0"/>
+        </a:xfrm>
+      </p:grpSpPr>
+      <p:sp>
+        <p:nvSpPr>
+          <p:cNvPr id="3" name="TextBox 2">
+            <a:extLst>
+              <a:ext uri="{FF2B5EF4-FFF2-40B4-BE49-F238E27FC236}">
+                <a16:creationId xmlns:a16="http://schemas.microsoft.com/office/drawing/2014/main" id="{F24915F8-6495-4119-62C2-AF94F034CD7A}"/>
+              </a:ext>
+            </a:extLst>
+          </p:cNvPr>
+          <p:cNvSpPr txBox="1"/>
+          <p:nvPr/>
+        </p:nvSpPr>
+        <p:spPr>
+          <a:xfrm>
+            <a:off x="0" y="0"/>
+            <a:ext cx="12192000" cy="355354"/>
+          </a:xfrm>
+          <a:prstGeom prst="rect">
+            <a:avLst/>
+          </a:prstGeom>
+          <a:noFill/>
+        </p:spPr>
+        <p:txBody>
+          <a:bodyPr wrap="square">
+            <a:spAutoFit/>
+          </a:bodyPr>
+          <a:lstStyle/>
+          <a:p>
+            <a:pPr>
+              <a:lnSpc>
+                <a:spcPct val="150000"/>
+              </a:lnSpc>
+              <a:buNone/>
+            </a:pPr>
+            <a:r>
+              <a:rPr kumimoji="0" lang="en-US" altLang="en-US" sz="1300" b="0" i="0" u="none" strike="noStrike" cap="none" normalizeH="0" baseline="0">
+                <a:ln>
+                  <a:noFill/>
+                </a:ln>
+                <a:solidFill>
+                  <a:schemeClr val="tx1"/>
+                </a:solidFill>
+                <a:effectLst/>
+                <a:latin typeface="Arial" panose="020B0604020202020204" pitchFamily="34" charset="0"/>
+              </a:rPr>
+              <a:t>.</a:t>
+            </a:r>
+          </a:p>
+        </p:txBody>
+      </p:sp>
+      <p:pic>
+        <p:nvPicPr>
+          <p:cNvPr id="6" name="Picture 5">
+            <a:extLst>
+              <a:ext uri="{FF2B5EF4-FFF2-40B4-BE49-F238E27FC236}">
+                <a16:creationId xmlns:a16="http://schemas.microsoft.com/office/drawing/2014/main" id="{98A22CF7-0A71-35E3-B63F-AEAE7DA5C2DD}"/>
+              </a:ext>
+            </a:extLst>
+          </p:cNvPr>
+          <p:cNvPicPr>
+            <a:picLocks noChangeAspect="1"/>
+          </p:cNvPicPr>
+          <p:nvPr/>
+        </p:nvPicPr>
+        <p:blipFill>
+          <a:blip r:embed="rId2"/>
+          <a:stretch>
+            <a:fillRect/>
+          </a:stretch>
+        </p:blipFill>
+        <p:spPr>
+          <a:xfrm>
+            <a:off x="6761020" y="1385601"/>
+            <a:ext cx="4477375" cy="4086795"/>
+          </a:xfrm>
+          <a:prstGeom prst="rect">
+            <a:avLst/>
+          </a:prstGeom>
+        </p:spPr>
+      </p:pic>
+      <p:sp>
+        <p:nvSpPr>
+          <p:cNvPr id="7" name="Arrow: Right 6">
+            <a:extLst>
+              <a:ext uri="{FF2B5EF4-FFF2-40B4-BE49-F238E27FC236}">
+                <a16:creationId xmlns:a16="http://schemas.microsoft.com/office/drawing/2014/main" id="{31883A93-82AB-3F83-2C10-AEC12524EB8F}"/>
+              </a:ext>
+            </a:extLst>
+          </p:cNvPr>
+          <p:cNvSpPr/>
+          <p:nvPr/>
+        </p:nvSpPr>
+        <p:spPr>
+          <a:xfrm>
+            <a:off x="5953284" y="3220025"/>
+            <a:ext cx="508000" cy="417945"/>
+          </a:xfrm>
+          <a:prstGeom prst="rightArrow">
+            <a:avLst/>
+          </a:prstGeom>
+        </p:spPr>
+        <p:style>
+          <a:lnRef idx="2">
+            <a:schemeClr val="dk1">
+              <a:shade val="15000"/>
+            </a:schemeClr>
+          </a:lnRef>
+          <a:fillRef idx="1">
+            <a:schemeClr val="dk1"/>
+          </a:fillRef>
+          <a:effectRef idx="0">
+            <a:schemeClr val="dk1"/>
+          </a:effectRef>
+          <a:fontRef idx="minor">
+            <a:schemeClr val="lt1"/>
+          </a:fontRef>
+        </p:style>
+        <p:txBody>
+          <a:bodyPr rtlCol="0" anchor="ctr"/>
+          <a:lstStyle/>
+          <a:p>
+            <a:pPr algn="ctr"/>
+            <a:endParaRPr lang="en-US"/>
+          </a:p>
+        </p:txBody>
+      </p:sp>
+      <p:grpSp>
+        <p:nvGrpSpPr>
+          <p:cNvPr id="13" name="Group 12">
+            <a:extLst>
+              <a:ext uri="{FF2B5EF4-FFF2-40B4-BE49-F238E27FC236}">
+                <a16:creationId xmlns:a16="http://schemas.microsoft.com/office/drawing/2014/main" id="{F75D7C73-D259-1E35-C00C-625626903C7B}"/>
+              </a:ext>
+            </a:extLst>
+          </p:cNvPr>
+          <p:cNvGrpSpPr/>
+          <p:nvPr/>
+        </p:nvGrpSpPr>
+        <p:grpSpPr>
+          <a:xfrm>
+            <a:off x="1107472" y="-1"/>
+            <a:ext cx="4546076" cy="6858000"/>
+            <a:chOff x="1107472" y="-1"/>
+            <a:chExt cx="4546076" cy="6858000"/>
+          </a:xfrm>
+        </p:grpSpPr>
+        <p:pic>
+          <p:nvPicPr>
+            <p:cNvPr id="4" name="Picture 3">
+              <a:extLst>
+                <a:ext uri="{FF2B5EF4-FFF2-40B4-BE49-F238E27FC236}">
+                  <a16:creationId xmlns:a16="http://schemas.microsoft.com/office/drawing/2014/main" id="{F1C4AC98-F60E-06C4-9DB5-2DFC4DC8F4BF}"/>
+                </a:ext>
+              </a:extLst>
+            </p:cNvPr>
+            <p:cNvPicPr>
+              <a:picLocks noChangeAspect="1"/>
+            </p:cNvPicPr>
+            <p:nvPr/>
+          </p:nvPicPr>
+          <p:blipFill>
+            <a:blip r:embed="rId3"/>
+            <a:stretch>
+              <a:fillRect/>
+            </a:stretch>
+          </p:blipFill>
+          <p:spPr>
+            <a:xfrm>
+              <a:off x="1107472" y="-1"/>
+              <a:ext cx="4546076" cy="6858000"/>
+            </a:xfrm>
+            <a:prstGeom prst="rect">
+              <a:avLst/>
+            </a:prstGeom>
+          </p:spPr>
+        </p:pic>
+        <mc:AlternateContent xmlns:mc="http://schemas.openxmlformats.org/markup-compatibility/2006">
+          <mc:Choice xmlns:p14="http://schemas.microsoft.com/office/powerpoint/2010/main" Requires="p14">
+            <p:contentPart p14:bwMode="auto" r:id="rId4">
+              <p14:nvContentPartPr>
+                <p14:cNvPr id="12" name="Ink 11">
+                  <a:extLst>
+                    <a:ext uri="{FF2B5EF4-FFF2-40B4-BE49-F238E27FC236}">
+                      <a16:creationId xmlns:a16="http://schemas.microsoft.com/office/drawing/2014/main" id="{45C04811-DAEA-B144-5DF7-ECC50BA5A656}"/>
+                    </a:ext>
+                  </a:extLst>
+                </p14:cNvPr>
+                <p14:cNvContentPartPr/>
+                <p14:nvPr/>
+              </p14:nvContentPartPr>
+              <p14:xfrm>
+                <a:off x="3528033" y="6733258"/>
+                <a:ext cx="1282680" cy="9360"/>
+              </p14:xfrm>
+            </p:contentPart>
+          </mc:Choice>
+          <mc:Fallback>
+            <p:pic>
+              <p:nvPicPr>
+                <p:cNvPr id="12" name="Ink 11">
+                  <a:extLst>
+                    <a:ext uri="{FF2B5EF4-FFF2-40B4-BE49-F238E27FC236}">
+                      <a16:creationId xmlns:a16="http://schemas.microsoft.com/office/drawing/2014/main" id="{45C04811-DAEA-B144-5DF7-ECC50BA5A656}"/>
+                    </a:ext>
+                  </a:extLst>
+                </p:cNvPr>
+                <p:cNvPicPr/>
+                <p:nvPr/>
+              </p:nvPicPr>
+              <p:blipFill>
+                <a:blip r:embed="rId5"/>
+                <a:stretch>
+                  <a:fillRect/>
+                </a:stretch>
+              </p:blipFill>
+              <p:spPr>
+                <a:xfrm>
+                  <a:off x="3521913" y="6727138"/>
+                  <a:ext cx="1294920" cy="21600"/>
+                </a:xfrm>
+                <a:prstGeom prst="rect">
+                  <a:avLst/>
+                </a:prstGeom>
+              </p:spPr>
+            </p:pic>
+          </mc:Fallback>
+        </mc:AlternateContent>
+      </p:grpSp>
+    </p:spTree>
+    <p:extLst>
+      <p:ext uri="{BB962C8B-B14F-4D97-AF65-F5344CB8AC3E}">
+        <p14:creationId xmlns:p14="http://schemas.microsoft.com/office/powerpoint/2010/main" val="3097310904"/>
+      </p:ext>
+    </p:extLst>
+  </p:cSld>
+  <p:clrMapOvr>
+    <a:masterClrMapping/>
+  </p:clrMapOvr>
+</p:sld>
+</file>
+
+<file path=ppt/slides/slide17.xml><?xml version="1.0" encoding="utf-8"?>
+<p:sld xmlns:a="http://schemas.openxmlformats.org/drawingml/2006/main" xmlns:r="http://schemas.openxmlformats.org/officeDocument/2006/relationships" xmlns:p="http://schemas.openxmlformats.org/presentationml/2006/main">
+  <p:cSld>
+    <p:spTree>
+      <p:nvGrpSpPr>
+        <p:cNvPr id="1" name="">
+          <a:extLst>
+            <a:ext uri="{FF2B5EF4-FFF2-40B4-BE49-F238E27FC236}">
+              <a16:creationId xmlns:a16="http://schemas.microsoft.com/office/drawing/2014/main" id="{52606E81-EBF6-CF2F-3749-CA3A32AE5EB8}"/>
+            </a:ext>
+          </a:extLst>
+        </p:cNvPr>
+        <p:cNvGrpSpPr/>
+        <p:nvPr/>
+      </p:nvGrpSpPr>
+      <p:grpSpPr>
+        <a:xfrm>
+          <a:off x="0" y="0"/>
+          <a:ext cx="0" cy="0"/>
+          <a:chOff x="0" y="0"/>
+          <a:chExt cx="0" cy="0"/>
+        </a:xfrm>
+      </p:grpSpPr>
+      <p:sp>
+        <p:nvSpPr>
+          <p:cNvPr id="3" name="TextBox 2">
+            <a:extLst>
+              <a:ext uri="{FF2B5EF4-FFF2-40B4-BE49-F238E27FC236}">
+                <a16:creationId xmlns:a16="http://schemas.microsoft.com/office/drawing/2014/main" id="{D4C4AC31-0C26-BECF-E469-D7062BAFC9AF}"/>
+              </a:ext>
+            </a:extLst>
+          </p:cNvPr>
+          <p:cNvSpPr txBox="1"/>
+          <p:nvPr/>
+        </p:nvSpPr>
+        <p:spPr>
+          <a:xfrm>
+            <a:off x="0" y="0"/>
+            <a:ext cx="12192000" cy="355354"/>
+          </a:xfrm>
+          <a:prstGeom prst="rect">
+            <a:avLst/>
+          </a:prstGeom>
+          <a:noFill/>
+        </p:spPr>
+        <p:txBody>
+          <a:bodyPr wrap="square">
+            <a:spAutoFit/>
+          </a:bodyPr>
+          <a:lstStyle/>
+          <a:p>
+            <a:pPr>
+              <a:lnSpc>
+                <a:spcPct val="150000"/>
+              </a:lnSpc>
+              <a:buNone/>
+            </a:pPr>
+            <a:r>
+              <a:rPr kumimoji="0" lang="en-US" altLang="en-US" sz="1300" b="0" i="0" u="none" strike="noStrike" cap="none" normalizeH="0" baseline="0">
+                <a:ln>
+                  <a:noFill/>
+                </a:ln>
+                <a:solidFill>
+                  <a:schemeClr val="tx1"/>
+                </a:solidFill>
+                <a:effectLst/>
+                <a:latin typeface="Arial" panose="020B0604020202020204" pitchFamily="34" charset="0"/>
+              </a:rPr>
+              <a:t>.</a:t>
+            </a:r>
+          </a:p>
+        </p:txBody>
+      </p:sp>
+      <p:pic>
+        <p:nvPicPr>
+          <p:cNvPr id="4" name="Picture 3">
+            <a:extLst>
+              <a:ext uri="{FF2B5EF4-FFF2-40B4-BE49-F238E27FC236}">
+                <a16:creationId xmlns:a16="http://schemas.microsoft.com/office/drawing/2014/main" id="{2D698374-2CDA-5325-95BC-B03B39FC712B}"/>
+              </a:ext>
+            </a:extLst>
+          </p:cNvPr>
+          <p:cNvPicPr>
+            <a:picLocks noChangeAspect="1"/>
+          </p:cNvPicPr>
+          <p:nvPr/>
+        </p:nvPicPr>
+        <p:blipFill>
+          <a:blip r:embed="rId2"/>
+          <a:stretch>
+            <a:fillRect/>
+          </a:stretch>
+        </p:blipFill>
+        <p:spPr>
+          <a:xfrm>
+            <a:off x="0" y="1732666"/>
+            <a:ext cx="12192000" cy="3392667"/>
+          </a:xfrm>
+          <a:prstGeom prst="rect">
+            <a:avLst/>
+          </a:prstGeom>
+          <a:solidFill>
+            <a:srgbClr val="FFFFFF">
+              <a:shade val="85000"/>
+            </a:srgbClr>
+          </a:solidFill>
+          <a:ln w="88900" cap="sq">
+            <a:solidFill>
+              <a:srgbClr val="FFFFFF"/>
+            </a:solidFill>
+            <a:miter lim="800000"/>
+          </a:ln>
+          <a:effectLst>
+            <a:outerShdw blurRad="55000" dist="18000" dir="5400000" algn="tl" rotWithShape="0">
+              <a:srgbClr val="000000">
+                <a:alpha val="40000"/>
+              </a:srgbClr>
+            </a:outerShdw>
+          </a:effectLst>
+          <a:scene3d>
+            <a:camera prst="orthographicFront"/>
+            <a:lightRig rig="twoPt" dir="t">
+              <a:rot lat="0" lon="0" rev="7200000"/>
+            </a:lightRig>
+          </a:scene3d>
+          <a:sp3d>
+            <a:bevelT w="25400" h="19050"/>
+            <a:contourClr>
+              <a:srgbClr val="FFFFFF"/>
+            </a:contourClr>
+          </a:sp3d>
+        </p:spPr>
+      </p:pic>
+    </p:spTree>
+    <p:extLst>
+      <p:ext uri="{BB962C8B-B14F-4D97-AF65-F5344CB8AC3E}">
+        <p14:creationId xmlns:p14="http://schemas.microsoft.com/office/powerpoint/2010/main" val="313008971"/>
+      </p:ext>
+    </p:extLst>
+  </p:cSld>
+  <p:clrMapOvr>
+    <a:masterClrMapping/>
+  </p:clrMapOvr>
+</p:sld>
+</file>
+
+<file path=ppt/slides/slide18.xml><?xml version="1.0" encoding="utf-8"?>
+<p:sld xmlns:a="http://schemas.openxmlformats.org/drawingml/2006/main" xmlns:r="http://schemas.openxmlformats.org/officeDocument/2006/relationships" xmlns:p="http://schemas.openxmlformats.org/presentationml/2006/main">
+  <p:cSld>
+    <p:spTree>
+      <p:nvGrpSpPr>
+        <p:cNvPr id="1" name="">
+          <a:extLst>
+            <a:ext uri="{FF2B5EF4-FFF2-40B4-BE49-F238E27FC236}">
+              <a16:creationId xmlns:a16="http://schemas.microsoft.com/office/drawing/2014/main" id="{7C59F7EC-DDB0-C5E0-E0BA-A0A1D15B18B4}"/>
+            </a:ext>
+          </a:extLst>
+        </p:cNvPr>
+        <p:cNvGrpSpPr/>
+        <p:nvPr/>
+      </p:nvGrpSpPr>
+      <p:grpSpPr>
+        <a:xfrm>
+          <a:off x="0" y="0"/>
+          <a:ext cx="0" cy="0"/>
+          <a:chOff x="0" y="0"/>
+          <a:chExt cx="0" cy="0"/>
+        </a:xfrm>
+      </p:grpSpPr>
+      <p:sp>
+        <p:nvSpPr>
+          <p:cNvPr id="3" name="TextBox 2">
+            <a:extLst>
+              <a:ext uri="{FF2B5EF4-FFF2-40B4-BE49-F238E27FC236}">
+                <a16:creationId xmlns:a16="http://schemas.microsoft.com/office/drawing/2014/main" id="{3B2F5C3C-83B3-987C-45ED-540BE93E1CD5}"/>
+              </a:ext>
+            </a:extLst>
+          </p:cNvPr>
+          <p:cNvSpPr txBox="1"/>
+          <p:nvPr/>
+        </p:nvSpPr>
+        <p:spPr>
+          <a:xfrm>
+            <a:off x="0" y="0"/>
+            <a:ext cx="12192000" cy="355354"/>
+          </a:xfrm>
+          <a:prstGeom prst="rect">
+            <a:avLst/>
+          </a:prstGeom>
+          <a:noFill/>
+        </p:spPr>
+        <p:txBody>
+          <a:bodyPr wrap="square">
+            <a:spAutoFit/>
+          </a:bodyPr>
+          <a:lstStyle/>
+          <a:p>
+            <a:pPr>
+              <a:lnSpc>
+                <a:spcPct val="150000"/>
+              </a:lnSpc>
+              <a:buNone/>
+            </a:pPr>
+            <a:r>
+              <a:rPr kumimoji="0" lang="en-US" altLang="en-US" sz="1300" b="0" i="0" u="none" strike="noStrike" cap="none" normalizeH="0" baseline="0">
+                <a:ln>
+                  <a:noFill/>
+                </a:ln>
+                <a:solidFill>
+                  <a:schemeClr val="tx1"/>
+                </a:solidFill>
+                <a:effectLst/>
+                <a:latin typeface="Arial" panose="020B0604020202020204" pitchFamily="34" charset="0"/>
+              </a:rPr>
+              <a:t>.</a:t>
+            </a:r>
+          </a:p>
+        </p:txBody>
+      </p:sp>
+    </p:spTree>
+    <p:extLst>
+      <p:ext uri="{BB962C8B-B14F-4D97-AF65-F5344CB8AC3E}">
+        <p14:creationId xmlns:p14="http://schemas.microsoft.com/office/powerpoint/2010/main" val="460670900"/>
+      </p:ext>
+    </p:extLst>
+  </p:cSld>
+  <p:clrMapOvr>
+    <a:masterClrMapping/>
+  </p:clrMapOvr>
+</p:sld>
+</file>
+
+<file path=ppt/slides/slide19.xml><?xml version="1.0" encoding="utf-8"?>
+<p:sld xmlns:a="http://schemas.openxmlformats.org/drawingml/2006/main" xmlns:r="http://schemas.openxmlformats.org/officeDocument/2006/relationships" xmlns:p="http://schemas.openxmlformats.org/presentationml/2006/main">
+  <p:cSld>
+    <p:spTree>
+      <p:nvGrpSpPr>
+        <p:cNvPr id="1" name="">
+          <a:extLst>
+            <a:ext uri="{FF2B5EF4-FFF2-40B4-BE49-F238E27FC236}">
+              <a16:creationId xmlns:a16="http://schemas.microsoft.com/office/drawing/2014/main" id="{074AE5AA-517F-F260-892A-328B0CAF8207}"/>
+            </a:ext>
+          </a:extLst>
+        </p:cNvPr>
+        <p:cNvGrpSpPr/>
+        <p:nvPr/>
+      </p:nvGrpSpPr>
+      <p:grpSpPr>
+        <a:xfrm>
+          <a:off x="0" y="0"/>
+          <a:ext cx="0" cy="0"/>
+          <a:chOff x="0" y="0"/>
+          <a:chExt cx="0" cy="0"/>
+        </a:xfrm>
+      </p:grpSpPr>
+      <p:sp>
+        <p:nvSpPr>
+          <p:cNvPr id="3" name="TextBox 2">
+            <a:extLst>
+              <a:ext uri="{FF2B5EF4-FFF2-40B4-BE49-F238E27FC236}">
+                <a16:creationId xmlns:a16="http://schemas.microsoft.com/office/drawing/2014/main" id="{04478110-B690-C635-530D-DC4FBFAD36C1}"/>
+              </a:ext>
+            </a:extLst>
+          </p:cNvPr>
+          <p:cNvSpPr txBox="1"/>
+          <p:nvPr/>
+        </p:nvSpPr>
+        <p:spPr>
+          <a:xfrm>
+            <a:off x="0" y="0"/>
+            <a:ext cx="12192000" cy="355354"/>
+          </a:xfrm>
+          <a:prstGeom prst="rect">
+            <a:avLst/>
+          </a:prstGeom>
+          <a:noFill/>
+        </p:spPr>
+        <p:txBody>
+          <a:bodyPr wrap="square">
+            <a:spAutoFit/>
+          </a:bodyPr>
+          <a:lstStyle/>
+          <a:p>
+            <a:pPr>
+              <a:lnSpc>
+                <a:spcPct val="150000"/>
+              </a:lnSpc>
+              <a:buNone/>
+            </a:pPr>
+            <a:r>
+              <a:rPr kumimoji="0" lang="en-US" altLang="en-US" sz="1300" b="0" i="0" u="none" strike="noStrike" cap="none" normalizeH="0" baseline="0">
+                <a:ln>
+                  <a:noFill/>
+                </a:ln>
+                <a:solidFill>
+                  <a:schemeClr val="tx1"/>
+                </a:solidFill>
+                <a:effectLst/>
+                <a:latin typeface="Arial" panose="020B0604020202020204" pitchFamily="34" charset="0"/>
+              </a:rPr>
+              <a:t>.</a:t>
+            </a:r>
+          </a:p>
+        </p:txBody>
+      </p:sp>
+    </p:spTree>
+    <p:extLst>
+      <p:ext uri="{BB962C8B-B14F-4D97-AF65-F5344CB8AC3E}">
+        <p14:creationId xmlns:p14="http://schemas.microsoft.com/office/powerpoint/2010/main" val="3737127349"/>
+      </p:ext>
+    </p:extLst>
+  </p:cSld>
+  <p:clrMapOvr>
+    <a:masterClrMapping/>
+  </p:clrMapOvr>
+</p:sld>
+</file>
+
 <file path=ppt/slides/slide2.xml><?xml version="1.0" encoding="utf-8"?>
+<p:sld xmlns:a="http://schemas.openxmlformats.org/drawingml/2006/main" xmlns:r="http://schemas.openxmlformats.org/officeDocument/2006/relationships" xmlns:p="http://schemas.openxmlformats.org/presentationml/2006/main">
+  <p:cSld>
+    <p:spTree>
+      <p:nvGrpSpPr>
+        <p:cNvPr id="1" name="">
+          <a:extLst>
+            <a:ext uri="{FF2B5EF4-FFF2-40B4-BE49-F238E27FC236}">
+              <a16:creationId xmlns:a16="http://schemas.microsoft.com/office/drawing/2014/main" id="{3EE02AA6-CFCD-D005-C529-A27431681856}"/>
+            </a:ext>
+          </a:extLst>
+        </p:cNvPr>
+        <p:cNvGrpSpPr/>
+        <p:nvPr/>
+      </p:nvGrpSpPr>
+      <p:grpSpPr>
+        <a:xfrm>
+          <a:off x="0" y="0"/>
+          <a:ext cx="0" cy="0"/>
+          <a:chOff x="0" y="0"/>
+          <a:chExt cx="0" cy="0"/>
+        </a:xfrm>
+      </p:grpSpPr>
+      <p:sp>
+        <p:nvSpPr>
+          <p:cNvPr id="3" name="TextBox 2">
+            <a:extLst>
+              <a:ext uri="{FF2B5EF4-FFF2-40B4-BE49-F238E27FC236}">
+                <a16:creationId xmlns:a16="http://schemas.microsoft.com/office/drawing/2014/main" id="{AC546881-F6FA-0486-F078-7ACFBBB9D498}"/>
+              </a:ext>
+            </a:extLst>
+          </p:cNvPr>
+          <p:cNvSpPr txBox="1"/>
+          <p:nvPr/>
+        </p:nvSpPr>
+        <p:spPr>
+          <a:xfrm>
+            <a:off x="0" y="0"/>
+            <a:ext cx="12192000" cy="355354"/>
+          </a:xfrm>
+          <a:prstGeom prst="rect">
+            <a:avLst/>
+          </a:prstGeom>
+          <a:noFill/>
+        </p:spPr>
+        <p:txBody>
+          <a:bodyPr wrap="square">
+            <a:spAutoFit/>
+          </a:bodyPr>
+          <a:lstStyle/>
+          <a:p>
+            <a:pPr>
+              <a:lnSpc>
+                <a:spcPct val="150000"/>
+              </a:lnSpc>
+              <a:buNone/>
+            </a:pPr>
+            <a:r>
+              <a:rPr kumimoji="0" lang="en-US" altLang="en-US" sz="1300" b="0" i="0" u="none" strike="noStrike" cap="none" normalizeH="0" baseline="0">
+                <a:ln>
+                  <a:noFill/>
+                </a:ln>
+                <a:solidFill>
+                  <a:schemeClr val="tx1"/>
+                </a:solidFill>
+                <a:effectLst/>
+                <a:latin typeface="Arial" panose="020B0604020202020204" pitchFamily="34" charset="0"/>
+              </a:rPr>
+              <a:t>.</a:t>
+            </a:r>
+          </a:p>
+        </p:txBody>
+      </p:sp>
+      <p:pic>
+        <p:nvPicPr>
+          <p:cNvPr id="4" name="Picture 3">
+            <a:extLst>
+              <a:ext uri="{FF2B5EF4-FFF2-40B4-BE49-F238E27FC236}">
+                <a16:creationId xmlns:a16="http://schemas.microsoft.com/office/drawing/2014/main" id="{DA0CD74A-21A8-80A1-2752-00AFDB0B085E}"/>
+              </a:ext>
+            </a:extLst>
+          </p:cNvPr>
+          <p:cNvPicPr>
+            <a:picLocks noChangeAspect="1"/>
+          </p:cNvPicPr>
+          <p:nvPr/>
+        </p:nvPicPr>
+        <p:blipFill>
+          <a:blip r:embed="rId2"/>
+          <a:stretch>
+            <a:fillRect/>
+          </a:stretch>
+        </p:blipFill>
+        <p:spPr>
+          <a:xfrm>
+            <a:off x="0" y="1173148"/>
+            <a:ext cx="12192000" cy="5684852"/>
+          </a:xfrm>
+          <a:prstGeom prst="rect">
+            <a:avLst/>
+          </a:prstGeom>
+        </p:spPr>
+      </p:pic>
+    </p:spTree>
+    <p:extLst>
+      <p:ext uri="{BB962C8B-B14F-4D97-AF65-F5344CB8AC3E}">
+        <p14:creationId xmlns:p14="http://schemas.microsoft.com/office/powerpoint/2010/main" val="4159507104"/>
+      </p:ext>
+    </p:extLst>
+  </p:cSld>
+  <p:clrMapOvr>
+    <a:masterClrMapping/>
+  </p:clrMapOvr>
+</p:sld>
+</file>
+
+<file path=ppt/slides/slide3.xml><?xml version="1.0" encoding="utf-8"?>
+<p:sld xmlns:a="http://schemas.openxmlformats.org/drawingml/2006/main" xmlns:r="http://schemas.openxmlformats.org/officeDocument/2006/relationships" xmlns:p="http://schemas.openxmlformats.org/presentationml/2006/main">
+  <p:cSld>
+    <p:spTree>
+      <p:nvGrpSpPr>
+        <p:cNvPr id="1" name="">
+          <a:extLst>
+            <a:ext uri="{FF2B5EF4-FFF2-40B4-BE49-F238E27FC236}">
+              <a16:creationId xmlns:a16="http://schemas.microsoft.com/office/drawing/2014/main" id="{BB87DB41-8870-25E0-319F-FBC756347993}"/>
+            </a:ext>
+          </a:extLst>
+        </p:cNvPr>
+        <p:cNvGrpSpPr/>
+        <p:nvPr/>
+      </p:nvGrpSpPr>
+      <p:grpSpPr>
+        <a:xfrm>
+          <a:off x="0" y="0"/>
+          <a:ext cx="0" cy="0"/>
+          <a:chOff x="0" y="0"/>
+          <a:chExt cx="0" cy="0"/>
+        </a:xfrm>
+      </p:grpSpPr>
+      <p:sp>
+        <p:nvSpPr>
+          <p:cNvPr id="3" name="TextBox 2">
+            <a:extLst>
+              <a:ext uri="{FF2B5EF4-FFF2-40B4-BE49-F238E27FC236}">
+                <a16:creationId xmlns:a16="http://schemas.microsoft.com/office/drawing/2014/main" id="{3F7CD561-C21F-233F-EEB4-AF0478356260}"/>
+              </a:ext>
+            </a:extLst>
+          </p:cNvPr>
+          <p:cNvSpPr txBox="1"/>
+          <p:nvPr/>
+        </p:nvSpPr>
+        <p:spPr>
+          <a:xfrm>
+            <a:off x="0" y="0"/>
+            <a:ext cx="12192000" cy="355354"/>
+          </a:xfrm>
+          <a:prstGeom prst="rect">
+            <a:avLst/>
+          </a:prstGeom>
+          <a:noFill/>
+        </p:spPr>
+        <p:txBody>
+          <a:bodyPr wrap="square">
+            <a:spAutoFit/>
+          </a:bodyPr>
+          <a:lstStyle/>
+          <a:p>
+            <a:pPr>
+              <a:lnSpc>
+                <a:spcPct val="150000"/>
+              </a:lnSpc>
+              <a:buNone/>
+            </a:pPr>
+            <a:r>
+              <a:rPr kumimoji="0" lang="en-US" altLang="en-US" sz="1300" b="0" i="0" u="none" strike="noStrike" cap="none" normalizeH="0" baseline="0">
+                <a:ln>
+                  <a:noFill/>
+                </a:ln>
+                <a:solidFill>
+                  <a:schemeClr val="tx1"/>
+                </a:solidFill>
+                <a:effectLst/>
+                <a:latin typeface="Arial" panose="020B0604020202020204" pitchFamily="34" charset="0"/>
+              </a:rPr>
+              <a:t>.</a:t>
+            </a:r>
+          </a:p>
+        </p:txBody>
+      </p:sp>
+      <p:pic>
+        <p:nvPicPr>
+          <p:cNvPr id="4" name="Picture 3">
+            <a:extLst>
+              <a:ext uri="{FF2B5EF4-FFF2-40B4-BE49-F238E27FC236}">
+                <a16:creationId xmlns:a16="http://schemas.microsoft.com/office/drawing/2014/main" id="{8BF543B8-1F2D-10CD-DEBD-F9B402D1CFD3}"/>
+              </a:ext>
+            </a:extLst>
+          </p:cNvPr>
+          <p:cNvPicPr>
+            <a:picLocks noChangeAspect="1"/>
+          </p:cNvPicPr>
+          <p:nvPr/>
+        </p:nvPicPr>
+        <p:blipFill>
+          <a:blip r:embed="rId2"/>
+          <a:stretch>
+            <a:fillRect/>
+          </a:stretch>
+        </p:blipFill>
+        <p:spPr>
+          <a:xfrm>
+            <a:off x="2654811" y="0"/>
+            <a:ext cx="6882377" cy="6858000"/>
+          </a:xfrm>
+          <a:prstGeom prst="rect">
+            <a:avLst/>
+          </a:prstGeom>
+        </p:spPr>
+      </p:pic>
+    </p:spTree>
+    <p:extLst>
+      <p:ext uri="{BB962C8B-B14F-4D97-AF65-F5344CB8AC3E}">
+        <p14:creationId xmlns:p14="http://schemas.microsoft.com/office/powerpoint/2010/main" val="3689877264"/>
+      </p:ext>
+    </p:extLst>
+  </p:cSld>
+  <p:clrMapOvr>
+    <a:masterClrMapping/>
+  </p:clrMapOvr>
+</p:sld>
+</file>
+
+<file path=ppt/slides/slide4.xml><?xml version="1.0" encoding="utf-8"?>
+<p:sld xmlns:a="http://schemas.openxmlformats.org/drawingml/2006/main" xmlns:r="http://schemas.openxmlformats.org/officeDocument/2006/relationships" xmlns:p="http://schemas.openxmlformats.org/presentationml/2006/main">
+  <p:cSld>
+    <p:spTree>
+      <p:nvGrpSpPr>
+        <p:cNvPr id="1" name="">
+          <a:extLst>
+            <a:ext uri="{FF2B5EF4-FFF2-40B4-BE49-F238E27FC236}">
+              <a16:creationId xmlns:a16="http://schemas.microsoft.com/office/drawing/2014/main" id="{0DB5ACC7-09CA-72E9-CC58-D092C0AE0D93}"/>
+            </a:ext>
+          </a:extLst>
+        </p:cNvPr>
+        <p:cNvGrpSpPr/>
+        <p:nvPr/>
+      </p:nvGrpSpPr>
+      <p:grpSpPr>
+        <a:xfrm>
+          <a:off x="0" y="0"/>
+          <a:ext cx="0" cy="0"/>
+          <a:chOff x="0" y="0"/>
+          <a:chExt cx="0" cy="0"/>
+        </a:xfrm>
+      </p:grpSpPr>
+      <p:sp>
+        <p:nvSpPr>
+          <p:cNvPr id="3" name="TextBox 2">
+            <a:extLst>
+              <a:ext uri="{FF2B5EF4-FFF2-40B4-BE49-F238E27FC236}">
+                <a16:creationId xmlns:a16="http://schemas.microsoft.com/office/drawing/2014/main" id="{02719A27-92D1-2D74-2077-1D7644A6C4E9}"/>
+              </a:ext>
+            </a:extLst>
+          </p:cNvPr>
+          <p:cNvSpPr txBox="1"/>
+          <p:nvPr/>
+        </p:nvSpPr>
+        <p:spPr>
+          <a:xfrm>
+            <a:off x="0" y="0"/>
+            <a:ext cx="12192000" cy="355354"/>
+          </a:xfrm>
+          <a:prstGeom prst="rect">
+            <a:avLst/>
+          </a:prstGeom>
+          <a:noFill/>
+        </p:spPr>
+        <p:txBody>
+          <a:bodyPr wrap="square">
+            <a:spAutoFit/>
+          </a:bodyPr>
+          <a:lstStyle/>
+          <a:p>
+            <a:pPr>
+              <a:lnSpc>
+                <a:spcPct val="150000"/>
+              </a:lnSpc>
+              <a:buNone/>
+            </a:pPr>
+            <a:r>
+              <a:rPr lang="az-Latn-AZ" altLang="en-US" sz="1300">
+                <a:latin typeface="Arial" panose="020B0604020202020204" pitchFamily="34" charset="0"/>
+              </a:rPr>
+              <a:t>Hal-hazırki nəticə.</a:t>
+            </a:r>
+            <a:endParaRPr kumimoji="0" lang="en-US" altLang="en-US" sz="1300" b="0" i="0" u="none" strike="noStrike" cap="none" normalizeH="0" baseline="0">
+              <a:ln>
+                <a:noFill/>
+              </a:ln>
+              <a:solidFill>
+                <a:schemeClr val="tx1"/>
+              </a:solidFill>
+              <a:effectLst/>
+              <a:latin typeface="Arial" panose="020B0604020202020204" pitchFamily="34" charset="0"/>
+            </a:endParaRPr>
+          </a:p>
+        </p:txBody>
+      </p:sp>
+      <p:pic>
+        <p:nvPicPr>
+          <p:cNvPr id="4" name="Picture 3">
+            <a:extLst>
+              <a:ext uri="{FF2B5EF4-FFF2-40B4-BE49-F238E27FC236}">
+                <a16:creationId xmlns:a16="http://schemas.microsoft.com/office/drawing/2014/main" id="{7AF0AF83-EA72-8790-BA1B-0508772F1149}"/>
+              </a:ext>
+            </a:extLst>
+          </p:cNvPr>
+          <p:cNvPicPr>
+            <a:picLocks noChangeAspect="1"/>
+          </p:cNvPicPr>
+          <p:nvPr/>
+        </p:nvPicPr>
+        <p:blipFill>
+          <a:blip r:embed="rId2"/>
+          <a:stretch>
+            <a:fillRect/>
+          </a:stretch>
+        </p:blipFill>
+        <p:spPr>
+          <a:xfrm>
+            <a:off x="0" y="568224"/>
+            <a:ext cx="12192000" cy="6289776"/>
+          </a:xfrm>
+          <a:prstGeom prst="rect">
+            <a:avLst/>
+          </a:prstGeom>
+        </p:spPr>
+      </p:pic>
+    </p:spTree>
+    <p:extLst>
+      <p:ext uri="{BB962C8B-B14F-4D97-AF65-F5344CB8AC3E}">
+        <p14:creationId xmlns:p14="http://schemas.microsoft.com/office/powerpoint/2010/main" val="3578926962"/>
+      </p:ext>
+    </p:extLst>
+  </p:cSld>
+  <p:clrMapOvr>
+    <a:masterClrMapping/>
+  </p:clrMapOvr>
+</p:sld>
+</file>
+
+<file path=ppt/slides/slide5.xml><?xml version="1.0" encoding="utf-8"?>
+<p:sld xmlns:a="http://schemas.openxmlformats.org/drawingml/2006/main" xmlns:r="http://schemas.openxmlformats.org/officeDocument/2006/relationships" xmlns:p="http://schemas.openxmlformats.org/presentationml/2006/main">
+  <p:cSld>
+    <p:spTree>
+      <p:nvGrpSpPr>
+        <p:cNvPr id="1" name="">
+          <a:extLst>
+            <a:ext uri="{FF2B5EF4-FFF2-40B4-BE49-F238E27FC236}">
+              <a16:creationId xmlns:a16="http://schemas.microsoft.com/office/drawing/2014/main" id="{C142732E-3BA6-BFC3-C522-C91073F4EFD0}"/>
+            </a:ext>
+          </a:extLst>
+        </p:cNvPr>
+        <p:cNvGrpSpPr/>
+        <p:nvPr/>
+      </p:nvGrpSpPr>
+      <p:grpSpPr>
+        <a:xfrm>
+          <a:off x="0" y="0"/>
+          <a:ext cx="0" cy="0"/>
+          <a:chOff x="0" y="0"/>
+          <a:chExt cx="0" cy="0"/>
+        </a:xfrm>
+      </p:grpSpPr>
+      <p:sp>
+        <p:nvSpPr>
+          <p:cNvPr id="3" name="TextBox 2">
+            <a:extLst>
+              <a:ext uri="{FF2B5EF4-FFF2-40B4-BE49-F238E27FC236}">
+                <a16:creationId xmlns:a16="http://schemas.microsoft.com/office/drawing/2014/main" id="{607B2812-C844-9203-FC98-9A170EE997A3}"/>
+              </a:ext>
+            </a:extLst>
+          </p:cNvPr>
+          <p:cNvSpPr txBox="1"/>
+          <p:nvPr/>
+        </p:nvSpPr>
+        <p:spPr>
+          <a:xfrm>
+            <a:off x="0" y="0"/>
+            <a:ext cx="12192000" cy="355354"/>
+          </a:xfrm>
+          <a:prstGeom prst="rect">
+            <a:avLst/>
+          </a:prstGeom>
+          <a:noFill/>
+        </p:spPr>
+        <p:txBody>
+          <a:bodyPr wrap="square">
+            <a:spAutoFit/>
+          </a:bodyPr>
+          <a:lstStyle/>
+          <a:p>
+            <a:pPr>
+              <a:lnSpc>
+                <a:spcPct val="150000"/>
+              </a:lnSpc>
+              <a:buNone/>
+            </a:pPr>
+            <a:r>
+              <a:rPr lang="az-Latn-AZ" altLang="en-US" sz="1300">
+                <a:latin typeface="Arial" panose="020B0604020202020204" pitchFamily="34" charset="0"/>
+              </a:rPr>
+              <a:t>Hələki </a:t>
+            </a:r>
+            <a:r>
+              <a:rPr lang="az-Latn-AZ" altLang="en-US" sz="1300" b="1">
+                <a:latin typeface="Arial" panose="020B0604020202020204" pitchFamily="34" charset="0"/>
+              </a:rPr>
+              <a:t>copy</a:t>
+            </a:r>
+            <a:r>
+              <a:rPr lang="az-Latn-AZ" altLang="en-US" sz="1300">
+                <a:latin typeface="Arial" panose="020B0604020202020204" pitchFamily="34" charset="0"/>
+              </a:rPr>
+              <a:t> </a:t>
+            </a:r>
+            <a:r>
+              <a:rPr lang="az-Latn-AZ" altLang="en-US" sz="1300" b="1">
+                <a:latin typeface="Arial" panose="020B0604020202020204" pitchFamily="34" charset="0"/>
+              </a:rPr>
+              <a:t>past</a:t>
+            </a:r>
+            <a:r>
+              <a:rPr lang="az-Latn-AZ" altLang="en-US" sz="1300">
+                <a:latin typeface="Arial" panose="020B0604020202020204" pitchFamily="34" charset="0"/>
+              </a:rPr>
+              <a:t> edirik. Təbii ki, dəyişikliklər olacaq</a:t>
+            </a:r>
+            <a:r>
+              <a:rPr lang="en-US" altLang="en-US" sz="1300">
+                <a:latin typeface="Arial" panose="020B0604020202020204" pitchFamily="34" charset="0"/>
+              </a:rPr>
+              <a:t> sonra</a:t>
+            </a:r>
+            <a:r>
+              <a:rPr lang="az-Latn-AZ" altLang="en-US" sz="1300">
+                <a:latin typeface="Arial" panose="020B0604020202020204" pitchFamily="34" charset="0"/>
+              </a:rPr>
+              <a:t>.</a:t>
+            </a:r>
+            <a:endParaRPr kumimoji="0" lang="en-US" altLang="en-US" sz="1300" b="0" i="0" u="none" strike="noStrike" cap="none" normalizeH="0" baseline="0">
+              <a:ln>
+                <a:noFill/>
+              </a:ln>
+              <a:solidFill>
+                <a:schemeClr val="tx1"/>
+              </a:solidFill>
+              <a:effectLst/>
+              <a:latin typeface="Arial" panose="020B0604020202020204" pitchFamily="34" charset="0"/>
+            </a:endParaRPr>
+          </a:p>
+        </p:txBody>
+      </p:sp>
+      <p:pic>
+        <p:nvPicPr>
+          <p:cNvPr id="4" name="Picture 3">
+            <a:extLst>
+              <a:ext uri="{FF2B5EF4-FFF2-40B4-BE49-F238E27FC236}">
+                <a16:creationId xmlns:a16="http://schemas.microsoft.com/office/drawing/2014/main" id="{B5F30E7C-1ADE-5083-1D7C-6BDB446DC3E9}"/>
+              </a:ext>
+            </a:extLst>
+          </p:cNvPr>
+          <p:cNvPicPr>
+            <a:picLocks noChangeAspect="1"/>
+          </p:cNvPicPr>
+          <p:nvPr/>
+        </p:nvPicPr>
+        <p:blipFill>
+          <a:blip r:embed="rId2"/>
+          <a:stretch>
+            <a:fillRect/>
+          </a:stretch>
+        </p:blipFill>
+        <p:spPr>
+          <a:xfrm>
+            <a:off x="1865745" y="434375"/>
+            <a:ext cx="10326255" cy="6423624"/>
+          </a:xfrm>
+          <a:prstGeom prst="rect">
+            <a:avLst/>
+          </a:prstGeom>
+        </p:spPr>
+      </p:pic>
+    </p:spTree>
+    <p:extLst>
+      <p:ext uri="{BB962C8B-B14F-4D97-AF65-F5344CB8AC3E}">
+        <p14:creationId xmlns:p14="http://schemas.microsoft.com/office/powerpoint/2010/main" val="1775392626"/>
+      </p:ext>
+    </p:extLst>
+  </p:cSld>
+  <p:clrMapOvr>
+    <a:masterClrMapping/>
+  </p:clrMapOvr>
+</p:sld>
+</file>
+
+<file path=ppt/slides/slide6.xml><?xml version="1.0" encoding="utf-8"?>
 <p:sld xmlns:a="http://schemas.openxmlformats.org/drawingml/2006/main" xmlns:r="http://schemas.openxmlformats.org/officeDocument/2006/relationships" xmlns:p="http://schemas.openxmlformats.org/presentationml/2006/main">
   <p:cSld>
     <p:spTree>
@@ -3470,6 +5457,36 @@
           </a:p>
         </p:txBody>
       </p:sp>
+      <p:pic>
+        <p:nvPicPr>
+          <p:cNvPr id="4" name="Picture 3">
+            <a:extLst>
+              <a:ext uri="{FF2B5EF4-FFF2-40B4-BE49-F238E27FC236}">
+                <a16:creationId xmlns:a16="http://schemas.microsoft.com/office/drawing/2014/main" id="{CD11F27E-5D06-99F3-7455-12E373587E2D}"/>
+              </a:ext>
+            </a:extLst>
+          </p:cNvPr>
+          <p:cNvPicPr>
+            <a:picLocks noChangeAspect="1"/>
+          </p:cNvPicPr>
+          <p:nvPr/>
+        </p:nvPicPr>
+        <p:blipFill>
+          <a:blip r:embed="rId2"/>
+          <a:stretch>
+            <a:fillRect/>
+          </a:stretch>
+        </p:blipFill>
+        <p:spPr>
+          <a:xfrm>
+            <a:off x="413544" y="132890"/>
+            <a:ext cx="11364911" cy="6592220"/>
+          </a:xfrm>
+          <a:prstGeom prst="rect">
+            <a:avLst/>
+          </a:prstGeom>
+        </p:spPr>
+      </p:pic>
     </p:spTree>
     <p:extLst>
       <p:ext uri="{BB962C8B-B14F-4D97-AF65-F5344CB8AC3E}">
@@ -3483,7 +5500,7 @@
 </p:sld>
 </file>
 
-<file path=ppt/slides/slide3.xml><?xml version="1.0" encoding="utf-8"?>
+<file path=ppt/slides/slide7.xml><?xml version="1.0" encoding="utf-8"?>
 <p:sld xmlns:a="http://schemas.openxmlformats.org/drawingml/2006/main" xmlns:r="http://schemas.openxmlformats.org/officeDocument/2006/relationships" xmlns:p="http://schemas.openxmlformats.org/presentationml/2006/main">
   <p:cSld>
     <p:spTree>
@@ -3491,7 +5508,7 @@
         <p:cNvPr id="1" name="">
           <a:extLst>
             <a:ext uri="{FF2B5EF4-FFF2-40B4-BE49-F238E27FC236}">
-              <a16:creationId xmlns:a16="http://schemas.microsoft.com/office/drawing/2014/main" id="{074AE5AA-517F-F260-892A-328B0CAF8207}"/>
+              <a16:creationId xmlns:a16="http://schemas.microsoft.com/office/drawing/2014/main" id="{9BD86E16-7159-BF70-9585-AF6D80F4AD3C}"/>
             </a:ext>
           </a:extLst>
         </p:cNvPr>
@@ -3511,7 +5528,7 @@
           <p:cNvPr id="3" name="TextBox 2">
             <a:extLst>
               <a:ext uri="{FF2B5EF4-FFF2-40B4-BE49-F238E27FC236}">
-                <a16:creationId xmlns:a16="http://schemas.microsoft.com/office/drawing/2014/main" id="{04478110-B690-C635-530D-DC4FBFAD36C1}"/>
+                <a16:creationId xmlns:a16="http://schemas.microsoft.com/office/drawing/2014/main" id="{9BD5F65B-0D9D-87AA-E9E0-3D258B7A5C5F}"/>
               </a:ext>
             </a:extLst>
           </p:cNvPr>
@@ -3556,10 +5573,312 @@
           </a:p>
         </p:txBody>
       </p:sp>
+      <p:pic>
+        <p:nvPicPr>
+          <p:cNvPr id="4" name="Picture 3">
+            <a:extLst>
+              <a:ext uri="{FF2B5EF4-FFF2-40B4-BE49-F238E27FC236}">
+                <a16:creationId xmlns:a16="http://schemas.microsoft.com/office/drawing/2014/main" id="{A55A25DD-6349-4424-4C10-EAD43B874D4C}"/>
+              </a:ext>
+            </a:extLst>
+          </p:cNvPr>
+          <p:cNvPicPr>
+            <a:picLocks noChangeAspect="1"/>
+          </p:cNvPicPr>
+          <p:nvPr/>
+        </p:nvPicPr>
+        <p:blipFill>
+          <a:blip r:embed="rId2"/>
+          <a:stretch>
+            <a:fillRect/>
+          </a:stretch>
+        </p:blipFill>
+        <p:spPr>
+          <a:xfrm>
+            <a:off x="263392" y="0"/>
+            <a:ext cx="11665216" cy="6858000"/>
+          </a:xfrm>
+          <a:prstGeom prst="rect">
+            <a:avLst/>
+          </a:prstGeom>
+        </p:spPr>
+      </p:pic>
     </p:spTree>
     <p:extLst>
       <p:ext uri="{BB962C8B-B14F-4D97-AF65-F5344CB8AC3E}">
-        <p14:creationId xmlns:p14="http://schemas.microsoft.com/office/powerpoint/2010/main" val="3737127349"/>
+        <p14:creationId xmlns:p14="http://schemas.microsoft.com/office/powerpoint/2010/main" val="2942092025"/>
+      </p:ext>
+    </p:extLst>
+  </p:cSld>
+  <p:clrMapOvr>
+    <a:masterClrMapping/>
+  </p:clrMapOvr>
+</p:sld>
+</file>
+
+<file path=ppt/slides/slide8.xml><?xml version="1.0" encoding="utf-8"?>
+<p:sld xmlns:a="http://schemas.openxmlformats.org/drawingml/2006/main" xmlns:r="http://schemas.openxmlformats.org/officeDocument/2006/relationships" xmlns:p="http://schemas.openxmlformats.org/presentationml/2006/main">
+  <p:cSld>
+    <p:spTree>
+      <p:nvGrpSpPr>
+        <p:cNvPr id="1" name="">
+          <a:extLst>
+            <a:ext uri="{FF2B5EF4-FFF2-40B4-BE49-F238E27FC236}">
+              <a16:creationId xmlns:a16="http://schemas.microsoft.com/office/drawing/2014/main" id="{C1ED0873-FC41-3BF7-5CDB-BEF711EAAD91}"/>
+            </a:ext>
+          </a:extLst>
+        </p:cNvPr>
+        <p:cNvGrpSpPr/>
+        <p:nvPr/>
+      </p:nvGrpSpPr>
+      <p:grpSpPr>
+        <a:xfrm>
+          <a:off x="0" y="0"/>
+          <a:ext cx="0" cy="0"/>
+          <a:chOff x="0" y="0"/>
+          <a:chExt cx="0" cy="0"/>
+        </a:xfrm>
+      </p:grpSpPr>
+      <p:sp>
+        <p:nvSpPr>
+          <p:cNvPr id="3" name="TextBox 2">
+            <a:extLst>
+              <a:ext uri="{FF2B5EF4-FFF2-40B4-BE49-F238E27FC236}">
+                <a16:creationId xmlns:a16="http://schemas.microsoft.com/office/drawing/2014/main" id="{ECCDE114-9C50-335F-AF2E-87031269C826}"/>
+              </a:ext>
+            </a:extLst>
+          </p:cNvPr>
+          <p:cNvSpPr txBox="1"/>
+          <p:nvPr/>
+        </p:nvSpPr>
+        <p:spPr>
+          <a:xfrm>
+            <a:off x="0" y="0"/>
+            <a:ext cx="12192000" cy="355354"/>
+          </a:xfrm>
+          <a:prstGeom prst="rect">
+            <a:avLst/>
+          </a:prstGeom>
+          <a:noFill/>
+        </p:spPr>
+        <p:txBody>
+          <a:bodyPr wrap="square">
+            <a:spAutoFit/>
+          </a:bodyPr>
+          <a:lstStyle/>
+          <a:p>
+            <a:pPr>
+              <a:lnSpc>
+                <a:spcPct val="150000"/>
+              </a:lnSpc>
+              <a:buNone/>
+            </a:pPr>
+            <a:r>
+              <a:rPr kumimoji="0" lang="en-US" altLang="en-US" sz="1300" b="0" i="0" u="none" strike="noStrike" cap="none" normalizeH="0" baseline="0">
+                <a:ln>
+                  <a:noFill/>
+                </a:ln>
+                <a:solidFill>
+                  <a:schemeClr val="tx1"/>
+                </a:solidFill>
+                <a:effectLst/>
+                <a:latin typeface="Arial" panose="020B0604020202020204" pitchFamily="34" charset="0"/>
+              </a:rPr>
+              <a:t>.</a:t>
+            </a:r>
+          </a:p>
+        </p:txBody>
+      </p:sp>
+      <p:pic>
+        <p:nvPicPr>
+          <p:cNvPr id="4" name="Picture 3">
+            <a:extLst>
+              <a:ext uri="{FF2B5EF4-FFF2-40B4-BE49-F238E27FC236}">
+                <a16:creationId xmlns:a16="http://schemas.microsoft.com/office/drawing/2014/main" id="{7E565037-C559-2530-BDA0-466C8A14CFCE}"/>
+              </a:ext>
+            </a:extLst>
+          </p:cNvPr>
+          <p:cNvPicPr>
+            <a:picLocks noChangeAspect="1"/>
+          </p:cNvPicPr>
+          <p:nvPr/>
+        </p:nvPicPr>
+        <p:blipFill>
+          <a:blip r:embed="rId2"/>
+          <a:stretch>
+            <a:fillRect/>
+          </a:stretch>
+        </p:blipFill>
+        <p:spPr>
+          <a:xfrm>
+            <a:off x="2631207" y="0"/>
+            <a:ext cx="6929586" cy="6858000"/>
+          </a:xfrm>
+          <a:prstGeom prst="rect">
+            <a:avLst/>
+          </a:prstGeom>
+        </p:spPr>
+      </p:pic>
+    </p:spTree>
+    <p:extLst>
+      <p:ext uri="{BB962C8B-B14F-4D97-AF65-F5344CB8AC3E}">
+        <p14:creationId xmlns:p14="http://schemas.microsoft.com/office/powerpoint/2010/main" val="2155229584"/>
+      </p:ext>
+    </p:extLst>
+  </p:cSld>
+  <p:clrMapOvr>
+    <a:masterClrMapping/>
+  </p:clrMapOvr>
+</p:sld>
+</file>
+
+<file path=ppt/slides/slide9.xml><?xml version="1.0" encoding="utf-8"?>
+<p:sld xmlns:a="http://schemas.openxmlformats.org/drawingml/2006/main" xmlns:r="http://schemas.openxmlformats.org/officeDocument/2006/relationships" xmlns:p="http://schemas.openxmlformats.org/presentationml/2006/main">
+  <p:cSld>
+    <p:spTree>
+      <p:nvGrpSpPr>
+        <p:cNvPr id="1" name="">
+          <a:extLst>
+            <a:ext uri="{FF2B5EF4-FFF2-40B4-BE49-F238E27FC236}">
+              <a16:creationId xmlns:a16="http://schemas.microsoft.com/office/drawing/2014/main" id="{27665531-231E-475C-6D62-F548F086A9E3}"/>
+            </a:ext>
+          </a:extLst>
+        </p:cNvPr>
+        <p:cNvGrpSpPr/>
+        <p:nvPr/>
+      </p:nvGrpSpPr>
+      <p:grpSpPr>
+        <a:xfrm>
+          <a:off x="0" y="0"/>
+          <a:ext cx="0" cy="0"/>
+          <a:chOff x="0" y="0"/>
+          <a:chExt cx="0" cy="0"/>
+        </a:xfrm>
+      </p:grpSpPr>
+      <p:sp>
+        <p:nvSpPr>
+          <p:cNvPr id="3" name="TextBox 2">
+            <a:extLst>
+              <a:ext uri="{FF2B5EF4-FFF2-40B4-BE49-F238E27FC236}">
+                <a16:creationId xmlns:a16="http://schemas.microsoft.com/office/drawing/2014/main" id="{9FABD49A-9C8F-A59C-459F-C294363BA036}"/>
+              </a:ext>
+            </a:extLst>
+          </p:cNvPr>
+          <p:cNvSpPr txBox="1"/>
+          <p:nvPr/>
+        </p:nvSpPr>
+        <p:spPr>
+          <a:xfrm>
+            <a:off x="0" y="0"/>
+            <a:ext cx="12192000" cy="355354"/>
+          </a:xfrm>
+          <a:prstGeom prst="rect">
+            <a:avLst/>
+          </a:prstGeom>
+          <a:noFill/>
+        </p:spPr>
+        <p:txBody>
+          <a:bodyPr wrap="square">
+            <a:spAutoFit/>
+          </a:bodyPr>
+          <a:lstStyle/>
+          <a:p>
+            <a:pPr>
+              <a:lnSpc>
+                <a:spcPct val="150000"/>
+              </a:lnSpc>
+              <a:buNone/>
+            </a:pPr>
+            <a:r>
+              <a:rPr kumimoji="0" lang="az-Latn-AZ" altLang="en-US" sz="1300" b="0" i="0" u="none" strike="noStrike" cap="none" normalizeH="0" baseline="0">
+                <a:ln>
+                  <a:noFill/>
+                </a:ln>
+                <a:solidFill>
+                  <a:schemeClr val="tx1"/>
+                </a:solidFill>
+                <a:effectLst/>
+                <a:latin typeface="Arial" panose="020B0604020202020204" pitchFamily="34" charset="0"/>
+              </a:rPr>
+              <a:t>İşləyir.</a:t>
+            </a:r>
+            <a:endParaRPr kumimoji="0" lang="en-US" altLang="en-US" sz="1300" b="0" i="0" u="none" strike="noStrike" cap="none" normalizeH="0" baseline="0">
+              <a:ln>
+                <a:noFill/>
+              </a:ln>
+              <a:solidFill>
+                <a:schemeClr val="tx1"/>
+              </a:solidFill>
+              <a:effectLst/>
+              <a:latin typeface="Arial" panose="020B0604020202020204" pitchFamily="34" charset="0"/>
+            </a:endParaRPr>
+          </a:p>
+        </p:txBody>
+      </p:sp>
+      <p:pic>
+        <p:nvPicPr>
+          <p:cNvPr id="4" name="Picture 3">
+            <a:extLst>
+              <a:ext uri="{FF2B5EF4-FFF2-40B4-BE49-F238E27FC236}">
+                <a16:creationId xmlns:a16="http://schemas.microsoft.com/office/drawing/2014/main" id="{040CA437-4617-0E5F-CC38-C226E404CBD7}"/>
+              </a:ext>
+            </a:extLst>
+          </p:cNvPr>
+          <p:cNvPicPr>
+            <a:picLocks noChangeAspect="1"/>
+          </p:cNvPicPr>
+          <p:nvPr/>
+        </p:nvPicPr>
+        <p:blipFill>
+          <a:blip r:embed="rId2"/>
+          <a:stretch>
+            <a:fillRect/>
+          </a:stretch>
+        </p:blipFill>
+        <p:spPr>
+          <a:xfrm>
+            <a:off x="0" y="2063945"/>
+            <a:ext cx="12192000" cy="2730110"/>
+          </a:xfrm>
+          <a:prstGeom prst="rect">
+            <a:avLst/>
+          </a:prstGeom>
+          <a:solidFill>
+            <a:srgbClr val="FFFFFF">
+              <a:shade val="85000"/>
+            </a:srgbClr>
+          </a:solidFill>
+          <a:ln w="88900" cap="sq">
+            <a:solidFill>
+              <a:srgbClr val="FFFFFF"/>
+            </a:solidFill>
+            <a:miter lim="800000"/>
+          </a:ln>
+          <a:effectLst>
+            <a:outerShdw blurRad="55000" dist="18000" dir="5400000" algn="tl" rotWithShape="0">
+              <a:srgbClr val="000000">
+                <a:alpha val="40000"/>
+              </a:srgbClr>
+            </a:outerShdw>
+          </a:effectLst>
+          <a:scene3d>
+            <a:camera prst="orthographicFront"/>
+            <a:lightRig rig="twoPt" dir="t">
+              <a:rot lat="0" lon="0" rev="7200000"/>
+            </a:lightRig>
+          </a:scene3d>
+          <a:sp3d>
+            <a:bevelT w="25400" h="19050"/>
+            <a:contourClr>
+              <a:srgbClr val="FFFFFF"/>
+            </a:contourClr>
+          </a:sp3d>
+        </p:spPr>
+      </p:pic>
+    </p:spTree>
+    <p:extLst>
+      <p:ext uri="{BB962C8B-B14F-4D97-AF65-F5344CB8AC3E}">
+        <p14:creationId xmlns:p14="http://schemas.microsoft.com/office/powerpoint/2010/main" val="3213035652"/>
       </p:ext>
     </p:extLst>
   </p:cSld>
